--- a/artifacts/active/Figure6_task_contracts_rsi_adapted_grouped.pptx
+++ b/artifacts/active/Figure6_task_contracts_rsi_adapted_grouped.pptx
@@ -504,7 +504,7 @@
       </p:grpSpPr>
       <p:grpSp>
         <p:nvGrpSpPr>
-          <p:cNvPr id="68" name="group-remaining-components"/>
+          <p:cNvPr id="2" name="group-remaining-components"/>
           <p:cNvGrpSpPr/>
           <p:nvPr/>
         </p:nvGrpSpPr>
@@ -518,7 +518,7 @@
         </p:grpSpPr>
         <p:sp>
           <p:nvSpPr>
-            <p:cNvPr id="2" name="Rect 2">
+            <p:cNvPr id="3" name="Rect 2">
               <a:extLst xmlns:a="http://schemas.openxmlformats.org/drawingml/2006/main">
                 <a:ext uri="{FF2B5EF4-FFF2-40B4-BE49-F238E27FC236}">
                   <a16:creationId xmlns:a16="http://schemas.microsoft.com/office/drawing/2014/main" id="{5A166B07-2A31-421F-8463-790F388097E1}"/>
@@ -553,7 +553,7 @@
         </p:sp>
         <p:sp>
           <p:nvSpPr>
-            <p:cNvPr id="3" name="Rect 3">
+            <p:cNvPr id="4" name="Rect 3">
               <a:extLst xmlns:a="http://schemas.openxmlformats.org/drawingml/2006/main">
                 <a:ext uri="{FF2B5EF4-FFF2-40B4-BE49-F238E27FC236}">
                   <a16:creationId xmlns:a16="http://schemas.microsoft.com/office/drawing/2014/main" id="{8E0752FD-64D8-4090-98D3-C36898FD4941}"/>
@@ -588,7 +588,7 @@
         </p:sp>
         <p:sp>
           <p:nvSpPr>
-            <p:cNvPr id="4" name="Rect 4">
+            <p:cNvPr id="5" name="Rect 4">
               <a:extLst xmlns:a="http://schemas.openxmlformats.org/drawingml/2006/main">
                 <a:ext uri="{FF2B5EF4-FFF2-40B4-BE49-F238E27FC236}">
                   <a16:creationId xmlns:a16="http://schemas.microsoft.com/office/drawing/2014/main" id="{F7D23FA3-6161-4925-BEA9-8D5FD5BA7425}"/>
@@ -623,7 +623,7 @@
         </p:sp>
         <p:sp>
           <p:nvSpPr>
-            <p:cNvPr id="5" name="Rect 5">
+            <p:cNvPr id="6" name="Rect 5">
               <a:extLst xmlns:a="http://schemas.openxmlformats.org/drawingml/2006/main">
                 <a:ext uri="{FF2B5EF4-FFF2-40B4-BE49-F238E27FC236}">
                   <a16:creationId xmlns:a16="http://schemas.microsoft.com/office/drawing/2014/main" id="{9DC3D657-5657-46EF-8EB1-B9B4A1CCAFE7}"/>
@@ -658,7 +658,7 @@
         </p:sp>
         <p:sp>
           <p:nvSpPr>
-            <p:cNvPr id="6" name="Line 6">
+            <p:cNvPr id="7" name="Line 6">
               <a:extLst xmlns:a="http://schemas.openxmlformats.org/drawingml/2006/main">
                 <a:ext uri="{FF2B5EF4-FFF2-40B4-BE49-F238E27FC236}">
                   <a16:creationId xmlns:a16="http://schemas.microsoft.com/office/drawing/2014/main" id="{50862E29-BC28-4ECF-9A5E-86898093AF83}"/>
@@ -694,7 +694,7 @@
         </p:sp>
         <p:sp>
           <p:nvSpPr>
-            <p:cNvPr id="7" name="Roundrect 7">
+            <p:cNvPr id="8" name="Roundrect 7">
               <a:extLst xmlns:a="http://schemas.openxmlformats.org/drawingml/2006/main">
                 <a:ext uri="{FF2B5EF4-FFF2-40B4-BE49-F238E27FC236}">
                   <a16:creationId xmlns:a16="http://schemas.microsoft.com/office/drawing/2014/main" id="{0D9125CF-B332-4708-BE2D-440919251950}"/>
@@ -732,7 +732,7 @@
         </p:sp>
         <p:sp>
           <p:nvSpPr>
-            <p:cNvPr id="8" name="Roundrect 8">
+            <p:cNvPr id="9" name="Roundrect 8">
               <a:extLst xmlns:a="http://schemas.openxmlformats.org/drawingml/2006/main">
                 <a:ext uri="{FF2B5EF4-FFF2-40B4-BE49-F238E27FC236}">
                   <a16:creationId xmlns:a16="http://schemas.microsoft.com/office/drawing/2014/main" id="{0261AEC8-175C-48F6-8CE3-17BE69A62B95}"/>
@@ -770,7 +770,7 @@
         </p:sp>
         <p:sp>
           <p:nvSpPr>
-            <p:cNvPr id="9" name="Roundrect 9">
+            <p:cNvPr id="10" name="Roundrect 9">
               <a:extLst xmlns:a="http://schemas.openxmlformats.org/drawingml/2006/main">
                 <a:ext uri="{FF2B5EF4-FFF2-40B4-BE49-F238E27FC236}">
                   <a16:creationId xmlns:a16="http://schemas.microsoft.com/office/drawing/2014/main" id="{49FB8E61-2E93-4D21-B86F-58F0456AF1C0}"/>
@@ -808,7 +808,7 @@
         </p:sp>
         <p:sp>
           <p:nvSpPr>
-            <p:cNvPr id="10" name="Roundrect 10">
+            <p:cNvPr id="11" name="Roundrect 10">
               <a:extLst xmlns:a="http://schemas.openxmlformats.org/drawingml/2006/main">
                 <a:ext uri="{FF2B5EF4-FFF2-40B4-BE49-F238E27FC236}">
                   <a16:creationId xmlns:a16="http://schemas.microsoft.com/office/drawing/2014/main" id="{A0E607FA-E1C5-48BB-AAED-982FED646BBA}"/>
@@ -846,7 +846,7 @@
         </p:sp>
         <p:sp>
           <p:nvSpPr>
-            <p:cNvPr id="11" name="Roundrect 11">
+            <p:cNvPr id="12" name="Roundrect 11">
               <a:extLst xmlns:a="http://schemas.openxmlformats.org/drawingml/2006/main">
                 <a:ext uri="{FF2B5EF4-FFF2-40B4-BE49-F238E27FC236}">
                   <a16:creationId xmlns:a16="http://schemas.microsoft.com/office/drawing/2014/main" id="{D3E75581-5C67-4C68-AD26-FCBAFD298190}"/>
@@ -884,7 +884,7 @@
         </p:sp>
         <p:sp>
           <p:nvSpPr>
-            <p:cNvPr id="12" name="Roundrect 12">
+            <p:cNvPr id="13" name="Roundrect 12">
               <a:extLst xmlns:a="http://schemas.openxmlformats.org/drawingml/2006/main">
                 <a:ext uri="{FF2B5EF4-FFF2-40B4-BE49-F238E27FC236}">
                   <a16:creationId xmlns:a16="http://schemas.microsoft.com/office/drawing/2014/main" id="{31F60344-3FF5-4357-A2DC-C268FE870D83}"/>
@@ -922,7 +922,7 @@
         </p:sp>
         <p:sp>
           <p:nvSpPr>
-            <p:cNvPr id="13" name="Roundrect 13">
+            <p:cNvPr id="14" name="Roundrect 13">
               <a:extLst xmlns:a="http://schemas.openxmlformats.org/drawingml/2006/main">
                 <a:ext uri="{FF2B5EF4-FFF2-40B4-BE49-F238E27FC236}">
                   <a16:creationId xmlns:a16="http://schemas.microsoft.com/office/drawing/2014/main" id="{76BCB369-706F-4F6C-A2AA-42C1BE67CDEB}"/>
@@ -960,7 +960,7 @@
         </p:sp>
         <p:sp>
           <p:nvSpPr>
-            <p:cNvPr id="14" name="Roundrect 14">
+            <p:cNvPr id="15" name="Roundrect 14">
               <a:extLst xmlns:a="http://schemas.openxmlformats.org/drawingml/2006/main">
                 <a:ext uri="{FF2B5EF4-FFF2-40B4-BE49-F238E27FC236}">
                   <a16:creationId xmlns:a16="http://schemas.microsoft.com/office/drawing/2014/main" id="{3F8937E9-47C8-4C6D-BD1D-6A55F0B9B0CC}"/>
@@ -998,7 +998,7 @@
         </p:sp>
         <p:sp>
           <p:nvSpPr>
-            <p:cNvPr id="15" name="Line 15">
+            <p:cNvPr id="16" name="Line 15">
               <a:extLst xmlns:a="http://schemas.openxmlformats.org/drawingml/2006/main">
                 <a:ext uri="{FF2B5EF4-FFF2-40B4-BE49-F238E27FC236}">
                   <a16:creationId xmlns:a16="http://schemas.microsoft.com/office/drawing/2014/main" id="{99516FAC-8327-41E0-B618-0E177BF5091F}"/>
@@ -1034,7 +1034,7 @@
         </p:sp>
         <p:sp>
           <p:nvSpPr>
-            <p:cNvPr id="16" name="Line 16">
+            <p:cNvPr id="17" name="Line 16">
               <a:extLst xmlns:a="http://schemas.openxmlformats.org/drawingml/2006/main">
                 <a:ext uri="{FF2B5EF4-FFF2-40B4-BE49-F238E27FC236}">
                   <a16:creationId xmlns:a16="http://schemas.microsoft.com/office/drawing/2014/main" id="{221D4FAB-20AF-40FA-82B2-1B6629018F8F}"/>
@@ -1070,7 +1070,7 @@
         </p:sp>
         <p:sp>
           <p:nvSpPr>
-            <p:cNvPr id="17" name="Line 17">
+            <p:cNvPr id="18" name="Line 17">
               <a:extLst xmlns:a="http://schemas.openxmlformats.org/drawingml/2006/main">
                 <a:ext uri="{FF2B5EF4-FFF2-40B4-BE49-F238E27FC236}">
                   <a16:creationId xmlns:a16="http://schemas.microsoft.com/office/drawing/2014/main" id="{526BC9E9-EDB7-4A44-B670-5E7A013AE687}"/>
@@ -1106,7 +1106,7 @@
         </p:sp>
         <p:sp>
           <p:nvSpPr>
-            <p:cNvPr id="18" name="Line 18">
+            <p:cNvPr id="19" name="Line 18">
               <a:extLst xmlns:a="http://schemas.openxmlformats.org/drawingml/2006/main">
                 <a:ext uri="{FF2B5EF4-FFF2-40B4-BE49-F238E27FC236}">
                   <a16:creationId xmlns:a16="http://schemas.microsoft.com/office/drawing/2014/main" id="{1E0B2CC9-61DF-4598-A5E3-805F4E3A348C}"/>
@@ -1142,7 +1142,7 @@
         </p:sp>
         <p:sp>
           <p:nvSpPr>
-            <p:cNvPr id="19" name="Line 19">
+            <p:cNvPr id="20" name="Line 19">
               <a:extLst xmlns:a="http://schemas.openxmlformats.org/drawingml/2006/main">
                 <a:ext uri="{FF2B5EF4-FFF2-40B4-BE49-F238E27FC236}">
                   <a16:creationId xmlns:a16="http://schemas.microsoft.com/office/drawing/2014/main" id="{8618E515-12A8-4277-8384-D167E2BB9099}"/>
@@ -1176,264 +1176,24 @@
             <a:p xmlns:a="http://schemas.openxmlformats.org/drawingml/2006/main"/>
           </p:txBody>
         </p:sp>
-        <p:pic>
-          <p:nvPicPr>
-            <p:cNvPr id="20" name="answer document revision icon">
-              <a:extLst xmlns:a="http://schemas.openxmlformats.org/drawingml/2006/main">
-                <a:ext uri="{FF2B5EF4-FFF2-40B4-BE49-F238E27FC236}">
-                  <a16:creationId xmlns:a16="http://schemas.microsoft.com/office/drawing/2014/main" id="{699E2FBC-53A4-4EC8-B6FF-89ABB085A239}"/>
-                </a:ext>
-              </a:extLst>
-            </p:cNvPr>
-            <p:cNvPicPr>
-              <a:picLocks xmlns:a="http://schemas.openxmlformats.org/drawingml/2006/main" noChangeAspect="1"/>
-            </p:cNvPicPr>
-            <p:nvPr/>
-          </p:nvPicPr>
-          <p:blipFill>
-            <a:blip xmlns:r="http://schemas.openxmlformats.org/officeDocument/2006/relationships" xmlns:a="http://schemas.openxmlformats.org/drawingml/2006/main" r:embed="R843ed17d7b7e41df"/>
-            <a:stretch xmlns:a="http://schemas.openxmlformats.org/drawingml/2006/main">
-              <a:fillRect l="0" t="0" r="0" b="0"/>
-            </a:stretch>
-          </p:blipFill>
+        <p:sp>
+          <p:nvSpPr>
+            <p:cNvPr id="21" name="TextBox 28">
+              <a:extLst xmlns:a="http://schemas.openxmlformats.org/drawingml/2006/main">
+                <a:ext uri="{FF2B5EF4-FFF2-40B4-BE49-F238E27FC236}">
+                  <a16:creationId xmlns:a16="http://schemas.microsoft.com/office/drawing/2014/main" id="{38DC6013-B653-4650-B823-505722C8E71E}"/>
+                </a:ext>
+              </a:extLst>
+            </p:cNvPr>
+            <p:cNvSpPr>
+              <a:spLocks xmlns:a="http://schemas.openxmlformats.org/drawingml/2006/main" noGrp="1"/>
+            </p:cNvSpPr>
+            <p:nvPr/>
+          </p:nvSpPr>
           <p:spPr>
             <a:xfrm xmlns:a="http://schemas.openxmlformats.org/drawingml/2006/main" rot="0" flipH="0" flipV="0">
-              <a:off x="2706237" y="1695861"/>
-              <a:ext cx="2035033" cy="1187102"/>
-            </a:xfrm>
-            <a:prstGeom xmlns:a="http://schemas.openxmlformats.org/drawingml/2006/main" prst="rect">
-              <a:avLst/>
-            </a:prstGeom>
-          </p:spPr>
-        </p:pic>
-        <p:pic>
-          <p:nvPicPr>
-            <p:cNvPr id="21" name="memory document stack icon">
-              <a:extLst xmlns:a="http://schemas.openxmlformats.org/drawingml/2006/main">
-                <a:ext uri="{FF2B5EF4-FFF2-40B4-BE49-F238E27FC236}">
-                  <a16:creationId xmlns:a16="http://schemas.microsoft.com/office/drawing/2014/main" id="{669A8428-86C0-4F8B-A2FE-B48CD4DF532C}"/>
-                </a:ext>
-              </a:extLst>
-            </p:cNvPr>
-            <p:cNvPicPr>
-              <a:picLocks xmlns:a="http://schemas.openxmlformats.org/drawingml/2006/main" noChangeAspect="1"/>
-            </p:cNvPicPr>
-            <p:nvPr/>
-          </p:nvPicPr>
-          <p:blipFill>
-            <a:blip xmlns:r="http://schemas.openxmlformats.org/officeDocument/2006/relationships" xmlns:a="http://schemas.openxmlformats.org/drawingml/2006/main" r:embed="R132be69d97c3476a"/>
-            <a:stretch xmlns:a="http://schemas.openxmlformats.org/drawingml/2006/main">
-              <a:fillRect l="0" t="0" r="0" b="0"/>
-            </a:stretch>
-          </p:blipFill>
-          <p:spPr>
-            <a:xfrm xmlns:a="http://schemas.openxmlformats.org/drawingml/2006/main" rot="0" flipH="0" flipV="0">
-              <a:off x="5748187" y="1589869"/>
-              <a:ext cx="1801852" cy="1536874"/>
-            </a:xfrm>
-            <a:prstGeom xmlns:a="http://schemas.openxmlformats.org/drawingml/2006/main" prst="rect">
-              <a:avLst/>
-            </a:prstGeom>
-          </p:spPr>
-        </p:pic>
-        <p:pic>
-          <p:nvPicPr>
-            <p:cNvPr id="22" name="parameter neural network icon">
-              <a:extLst xmlns:a="http://schemas.openxmlformats.org/drawingml/2006/main">
-                <a:ext uri="{FF2B5EF4-FFF2-40B4-BE49-F238E27FC236}">
-                  <a16:creationId xmlns:a16="http://schemas.microsoft.com/office/drawing/2014/main" id="{962E0259-AFD4-4ADB-A76C-F74F5D37A331}"/>
-                </a:ext>
-              </a:extLst>
-            </p:cNvPr>
-            <p:cNvPicPr>
-              <a:picLocks xmlns:a="http://schemas.openxmlformats.org/drawingml/2006/main" noChangeAspect="1"/>
-            </p:cNvPicPr>
-            <p:nvPr/>
-          </p:nvPicPr>
-          <p:blipFill>
-            <a:blip xmlns:r="http://schemas.openxmlformats.org/officeDocument/2006/relationships" xmlns:a="http://schemas.openxmlformats.org/drawingml/2006/main" r:embed="R3184e6d167a54a79"/>
-            <a:stretch xmlns:a="http://schemas.openxmlformats.org/drawingml/2006/main">
-              <a:fillRect l="0" t="0" r="0" b="0"/>
-            </a:stretch>
-          </p:blipFill>
-          <p:spPr>
-            <a:xfrm xmlns:a="http://schemas.openxmlformats.org/drawingml/2006/main" rot="0" flipH="0" flipV="0">
-              <a:off x="8949125" y="1579270"/>
-              <a:ext cx="2268214" cy="1293094"/>
-            </a:xfrm>
-            <a:prstGeom xmlns:a="http://schemas.openxmlformats.org/drawingml/2006/main" prst="rect">
-              <a:avLst/>
-            </a:prstGeom>
-          </p:spPr>
-        </p:pic>
-        <p:pic>
-          <p:nvPicPr>
-            <p:cNvPr id="23" name="improver procedure graph icon">
-              <a:extLst xmlns:a="http://schemas.openxmlformats.org/drawingml/2006/main">
-                <a:ext uri="{FF2B5EF4-FFF2-40B4-BE49-F238E27FC236}">
-                  <a16:creationId xmlns:a16="http://schemas.microsoft.com/office/drawing/2014/main" id="{D6A4CD9A-10D5-4AF9-82C0-298CD6DD15CE}"/>
-                </a:ext>
-              </a:extLst>
-            </p:cNvPr>
-            <p:cNvPicPr>
-              <a:picLocks xmlns:a="http://schemas.openxmlformats.org/drawingml/2006/main" noChangeAspect="1"/>
-            </p:cNvPicPr>
-            <p:nvPr/>
-          </p:nvPicPr>
-          <p:blipFill>
-            <a:blip xmlns:r="http://schemas.openxmlformats.org/officeDocument/2006/relationships" xmlns:a="http://schemas.openxmlformats.org/drawingml/2006/main" r:embed="R54561db6dbfb45c3"/>
-            <a:stretch xmlns:a="http://schemas.openxmlformats.org/drawingml/2006/main">
-              <a:fillRect l="0" t="0" r="0" b="0"/>
-            </a:stretch>
-          </p:blipFill>
-          <p:spPr>
-            <a:xfrm xmlns:a="http://schemas.openxmlformats.org/drawingml/2006/main" rot="0" flipH="0" flipV="0">
-              <a:off x="12160661" y="1642865"/>
-              <a:ext cx="1854848" cy="1165904"/>
-            </a:xfrm>
-            <a:prstGeom xmlns:a="http://schemas.openxmlformats.org/drawingml/2006/main" prst="rect">
-              <a:avLst/>
-            </a:prstGeom>
-          </p:spPr>
-        </p:pic>
-        <p:pic>
-          <p:nvPicPr>
-            <p:cNvPr id="24" name="solver network icon">
-              <a:extLst xmlns:a="http://schemas.openxmlformats.org/drawingml/2006/main">
-                <a:ext uri="{FF2B5EF4-FFF2-40B4-BE49-F238E27FC236}">
-                  <a16:creationId xmlns:a16="http://schemas.microsoft.com/office/drawing/2014/main" id="{D2F7935A-7950-4FCA-BAB7-ACC1231A01E1}"/>
-                </a:ext>
-              </a:extLst>
-            </p:cNvPr>
-            <p:cNvPicPr>
-              <a:picLocks xmlns:a="http://schemas.openxmlformats.org/drawingml/2006/main" noChangeAspect="1"/>
-            </p:cNvPicPr>
-            <p:nvPr/>
-          </p:nvPicPr>
-          <p:blipFill>
-            <a:blip xmlns:r="http://schemas.openxmlformats.org/officeDocument/2006/relationships" xmlns:a="http://schemas.openxmlformats.org/drawingml/2006/main" r:embed="Ra46b0078b3764c5a"/>
-            <a:stretch xmlns:a="http://schemas.openxmlformats.org/drawingml/2006/main">
-              <a:fillRect l="0" t="0" r="0" b="0"/>
-            </a:stretch>
-          </p:blipFill>
-          <p:spPr>
-            <a:xfrm xmlns:a="http://schemas.openxmlformats.org/drawingml/2006/main" rot="0" flipH="0" flipV="0">
-              <a:off x="2674440" y="6147495"/>
-              <a:ext cx="1801852" cy="826732"/>
-            </a:xfrm>
-            <a:prstGeom xmlns:a="http://schemas.openxmlformats.org/drawingml/2006/main" prst="rect">
-              <a:avLst/>
-            </a:prstGeom>
-          </p:spPr>
-        </p:pic>
-        <p:pic>
-          <p:nvPicPr>
-            <p:cNvPr id="25" name="solver plus memory icon">
-              <a:extLst xmlns:a="http://schemas.openxmlformats.org/drawingml/2006/main">
-                <a:ext uri="{FF2B5EF4-FFF2-40B4-BE49-F238E27FC236}">
-                  <a16:creationId xmlns:a16="http://schemas.microsoft.com/office/drawing/2014/main" id="{0F9F81FC-2E7D-43D6-87E9-42590E56A5FD}"/>
-                </a:ext>
-              </a:extLst>
-            </p:cNvPr>
-            <p:cNvPicPr>
-              <a:picLocks xmlns:a="http://schemas.openxmlformats.org/drawingml/2006/main" noChangeAspect="1"/>
-            </p:cNvPicPr>
-            <p:nvPr/>
-          </p:nvPicPr>
-          <p:blipFill>
-            <a:blip xmlns:r="http://schemas.openxmlformats.org/officeDocument/2006/relationships" xmlns:a="http://schemas.openxmlformats.org/drawingml/2006/main" r:embed="Rccd1ea46c26d4492"/>
-            <a:stretch xmlns:a="http://schemas.openxmlformats.org/drawingml/2006/main">
-              <a:fillRect l="0" t="0" r="0" b="0"/>
-            </a:stretch>
-          </p:blipFill>
-          <p:spPr>
-            <a:xfrm xmlns:a="http://schemas.openxmlformats.org/drawingml/2006/main" rot="0" flipH="0" flipV="0">
-              <a:off x="5822381" y="6105099"/>
-              <a:ext cx="1695861" cy="826732"/>
-            </a:xfrm>
-            <a:prstGeom xmlns:a="http://schemas.openxmlformats.org/drawingml/2006/main" prst="rect">
-              <a:avLst/>
-            </a:prstGeom>
-          </p:spPr>
-        </p:pic>
-        <p:pic>
-          <p:nvPicPr>
-            <p:cNvPr id="26" name="updated parameter matrix icon">
-              <a:extLst xmlns:a="http://schemas.openxmlformats.org/drawingml/2006/main">
-                <a:ext uri="{FF2B5EF4-FFF2-40B4-BE49-F238E27FC236}">
-                  <a16:creationId xmlns:a16="http://schemas.microsoft.com/office/drawing/2014/main" id="{93E2DC27-84F6-4E9D-833E-CE40B32E8FBB}"/>
-                </a:ext>
-              </a:extLst>
-            </p:cNvPr>
-            <p:cNvPicPr>
-              <a:picLocks xmlns:a="http://schemas.openxmlformats.org/drawingml/2006/main" noChangeAspect="1"/>
-            </p:cNvPicPr>
-            <p:nvPr/>
-          </p:nvPicPr>
-          <p:blipFill>
-            <a:blip xmlns:r="http://schemas.openxmlformats.org/officeDocument/2006/relationships" xmlns:a="http://schemas.openxmlformats.org/drawingml/2006/main" r:embed="R93f55ff11b0e4415"/>
-            <a:stretch xmlns:a="http://schemas.openxmlformats.org/drawingml/2006/main">
-              <a:fillRect l="0" t="0" r="0" b="0"/>
-            </a:stretch>
-          </p:blipFill>
-          <p:spPr>
-            <a:xfrm xmlns:a="http://schemas.openxmlformats.org/drawingml/2006/main" rot="0" flipH="0" flipV="0">
-              <a:off x="9076314" y="6083900"/>
-              <a:ext cx="1907843" cy="953922"/>
-            </a:xfrm>
-            <a:prstGeom xmlns:a="http://schemas.openxmlformats.org/drawingml/2006/main" prst="rect">
-              <a:avLst/>
-            </a:prstGeom>
-          </p:spPr>
-        </p:pic>
-        <p:pic>
-          <p:nvPicPr>
-            <p:cNvPr id="27" name="next update process icon">
-              <a:extLst xmlns:a="http://schemas.openxmlformats.org/drawingml/2006/main">
-                <a:ext uri="{FF2B5EF4-FFF2-40B4-BE49-F238E27FC236}">
-                  <a16:creationId xmlns:a16="http://schemas.microsoft.com/office/drawing/2014/main" id="{A6A132AE-E1F5-474A-B8D2-DA1C4301EC09}"/>
-                </a:ext>
-              </a:extLst>
-            </p:cNvPr>
-            <p:cNvPicPr>
-              <a:picLocks xmlns:a="http://schemas.openxmlformats.org/drawingml/2006/main" noChangeAspect="1"/>
-            </p:cNvPicPr>
-            <p:nvPr/>
-          </p:nvPicPr>
-          <p:blipFill>
-            <a:blip xmlns:r="http://schemas.openxmlformats.org/officeDocument/2006/relationships" xmlns:a="http://schemas.openxmlformats.org/drawingml/2006/main" r:embed="R0d3acbb160f24d14"/>
-            <a:stretch xmlns:a="http://schemas.openxmlformats.org/drawingml/2006/main">
-              <a:fillRect l="0" t="0" r="0" b="0"/>
-            </a:stretch>
-          </p:blipFill>
-          <p:spPr>
-            <a:xfrm xmlns:a="http://schemas.openxmlformats.org/drawingml/2006/main" rot="0" flipH="0" flipV="0">
-              <a:off x="12139462" y="6083900"/>
-              <a:ext cx="1748856" cy="847930"/>
-            </a:xfrm>
-            <a:prstGeom xmlns:a="http://schemas.openxmlformats.org/drawingml/2006/main" prst="rect">
-              <a:avLst/>
-            </a:prstGeom>
-          </p:spPr>
-        </p:pic>
-        <p:sp>
-          <p:nvSpPr>
-            <p:cNvPr id="28" name="TextBox 28">
-              <a:extLst xmlns:a="http://schemas.openxmlformats.org/drawingml/2006/main">
-                <a:ext uri="{FF2B5EF4-FFF2-40B4-BE49-F238E27FC236}">
-                  <a16:creationId xmlns:a16="http://schemas.microsoft.com/office/drawing/2014/main" id="{38DC6013-B653-4650-B823-505722C8E71E}"/>
-                </a:ext>
-              </a:extLst>
-            </p:cNvPr>
-            <p:cNvSpPr>
-              <a:spLocks xmlns:a="http://schemas.openxmlformats.org/drawingml/2006/main" noGrp="1"/>
-            </p:cNvSpPr>
-            <p:nvPr/>
-          </p:nvSpPr>
-          <p:spPr>
-            <a:xfrm xmlns:a="http://schemas.openxmlformats.org/drawingml/2006/main" rot="0" flipH="0" flipV="0">
-              <a:off x="2176281" y="476961"/>
-              <a:ext cx="2596787" cy="582952"/>
+              <a:off x="2176281" y="580000"/>
+              <a:ext cx="2596787" cy="670000"/>
             </a:xfrm>
             <a:prstGeom xmlns:a="http://schemas.openxmlformats.org/drawingml/2006/main" prst="rect">
               <a:avLst/>
@@ -1453,7 +1213,7 @@
                 <a:buNone/>
               </a:pPr>
               <a:r>
-                <a:rPr sz="3100" b="1">
+                <a:rPr sz="2500" b="1">
                   <a:solidFill>
                     <a:srgbClr val="111111"/>
                   </a:solidFill>
@@ -1469,7 +1229,7 @@
         </p:sp>
         <p:sp>
           <p:nvSpPr>
-            <p:cNvPr id="29" name="TextBox 29">
+            <p:cNvPr id="22" name="TextBox 29">
               <a:extLst xmlns:a="http://schemas.openxmlformats.org/drawingml/2006/main">
                 <a:ext uri="{FF2B5EF4-FFF2-40B4-BE49-F238E27FC236}">
                   <a16:creationId xmlns:a16="http://schemas.microsoft.com/office/drawing/2014/main" id="{804B3A42-CA43-424C-BE98-79636EA2A1E0}"/>
@@ -1483,8 +1243,8 @@
           </p:nvSpPr>
           <p:spPr>
             <a:xfrm xmlns:a="http://schemas.openxmlformats.org/drawingml/2006/main" rot="0" flipH="0" flipV="0">
-              <a:off x="2176281" y="1123508"/>
-              <a:ext cx="2596787" cy="402767"/>
+              <a:off x="2176281" y="1350000"/>
+              <a:ext cx="2596787" cy="420000"/>
             </a:xfrm>
             <a:prstGeom xmlns:a="http://schemas.openxmlformats.org/drawingml/2006/main" prst="rect">
               <a:avLst/>
@@ -1504,7 +1264,7 @@
                 <a:buNone/>
               </a:pPr>
               <a:r>
-                <a:rPr sz="1300" i="1">
+                <a:rPr sz="1400" i="1">
                   <a:solidFill>
                     <a:srgbClr val="6B6B6B"/>
                   </a:solidFill>
@@ -1521,7 +1281,7 @@
                 <a:buNone/>
               </a:pPr>
               <a:r>
-                <a:rPr sz="1300" i="1">
+                <a:rPr sz="1400" i="1">
                   <a:solidFill>
                     <a:srgbClr val="6B6B6B"/>
                   </a:solidFill>
@@ -1537,7 +1297,7 @@
         </p:sp>
         <p:sp>
           <p:nvSpPr>
-            <p:cNvPr id="30" name="TextBox 30">
+            <p:cNvPr id="23" name="TextBox 30">
               <a:extLst xmlns:a="http://schemas.openxmlformats.org/drawingml/2006/main">
                 <a:ext uri="{FF2B5EF4-FFF2-40B4-BE49-F238E27FC236}">
                   <a16:creationId xmlns:a16="http://schemas.microsoft.com/office/drawing/2014/main" id="{5895AB9E-482E-4800-9A6E-68D0D1FE8765}"/>
@@ -1551,8 +1311,8 @@
           </p:nvSpPr>
           <p:spPr>
             <a:xfrm xmlns:a="http://schemas.openxmlformats.org/drawingml/2006/main" rot="0" flipH="0" flipV="0">
-              <a:off x="5398416" y="476961"/>
-              <a:ext cx="2596787" cy="582952"/>
+              <a:off x="5398416" y="580000"/>
+              <a:ext cx="2596787" cy="670000"/>
             </a:xfrm>
             <a:prstGeom xmlns:a="http://schemas.openxmlformats.org/drawingml/2006/main" prst="rect">
               <a:avLst/>
@@ -1572,7 +1332,7 @@
                 <a:buNone/>
               </a:pPr>
               <a:r>
-                <a:rPr sz="3100" b="1">
+                <a:rPr sz="2500" b="1">
                   <a:solidFill>
                     <a:srgbClr val="111111"/>
                   </a:solidFill>
@@ -1588,7 +1348,7 @@
         </p:sp>
         <p:sp>
           <p:nvSpPr>
-            <p:cNvPr id="31" name="TextBox 31">
+            <p:cNvPr id="24" name="TextBox 31">
               <a:extLst xmlns:a="http://schemas.openxmlformats.org/drawingml/2006/main">
                 <a:ext uri="{FF2B5EF4-FFF2-40B4-BE49-F238E27FC236}">
                   <a16:creationId xmlns:a16="http://schemas.microsoft.com/office/drawing/2014/main" id="{CCC6B642-49D2-4270-B08E-AEB9A71964B5}"/>
@@ -1602,8 +1362,8 @@
           </p:nvSpPr>
           <p:spPr>
             <a:xfrm xmlns:a="http://schemas.openxmlformats.org/drawingml/2006/main" rot="0" flipH="0" flipV="0">
-              <a:off x="5398416" y="1123508"/>
-              <a:ext cx="2596787" cy="402767"/>
+              <a:off x="5398416" y="1350000"/>
+              <a:ext cx="2596787" cy="420000"/>
             </a:xfrm>
             <a:prstGeom xmlns:a="http://schemas.openxmlformats.org/drawingml/2006/main" prst="rect">
               <a:avLst/>
@@ -1623,7 +1383,7 @@
                 <a:buNone/>
               </a:pPr>
               <a:r>
-                <a:rPr sz="1800" i="1">
+                <a:rPr sz="1400" i="1">
                   <a:solidFill>
                     <a:srgbClr val="6B6B6B"/>
                   </a:solidFill>
@@ -1640,7 +1400,7 @@
                 <a:buNone/>
               </a:pPr>
               <a:r>
-                <a:rPr sz="1800" i="1">
+                <a:rPr sz="1400" i="1">
                   <a:solidFill>
                     <a:srgbClr val="6B6B6B"/>
                   </a:solidFill>
@@ -1656,7 +1416,7 @@
         </p:sp>
         <p:sp>
           <p:nvSpPr>
-            <p:cNvPr id="32" name="TextBox 32">
+            <p:cNvPr id="25" name="TextBox 32">
               <a:extLst xmlns:a="http://schemas.openxmlformats.org/drawingml/2006/main">
                 <a:ext uri="{FF2B5EF4-FFF2-40B4-BE49-F238E27FC236}">
                   <a16:creationId xmlns:a16="http://schemas.microsoft.com/office/drawing/2014/main" id="{9FF294C6-C834-4131-95D3-F327331F586C}"/>
@@ -1670,8 +1430,8 @@
           </p:nvSpPr>
           <p:spPr>
             <a:xfrm xmlns:a="http://schemas.openxmlformats.org/drawingml/2006/main" rot="0" flipH="0" flipV="0">
-              <a:off x="8631151" y="476961"/>
-              <a:ext cx="2596787" cy="582952"/>
+              <a:off x="8631151" y="580000"/>
+              <a:ext cx="2596787" cy="670000"/>
             </a:xfrm>
             <a:prstGeom xmlns:a="http://schemas.openxmlformats.org/drawingml/2006/main" prst="rect">
               <a:avLst/>
@@ -1691,7 +1451,7 @@
                 <a:buNone/>
               </a:pPr>
               <a:r>
-                <a:rPr sz="3100" b="1">
+                <a:rPr sz="2500" b="1">
                   <a:solidFill>
                     <a:srgbClr val="111111"/>
                   </a:solidFill>
@@ -1707,7 +1467,7 @@
         </p:sp>
         <p:sp>
           <p:nvSpPr>
-            <p:cNvPr id="33" name="TextBox 33">
+            <p:cNvPr id="26" name="TextBox 33">
               <a:extLst xmlns:a="http://schemas.openxmlformats.org/drawingml/2006/main">
                 <a:ext uri="{FF2B5EF4-FFF2-40B4-BE49-F238E27FC236}">
                   <a16:creationId xmlns:a16="http://schemas.microsoft.com/office/drawing/2014/main" id="{12527545-BA87-4974-B137-BFFB485D9DDB}"/>
@@ -1721,8 +1481,8 @@
           </p:nvSpPr>
           <p:spPr>
             <a:xfrm xmlns:a="http://schemas.openxmlformats.org/drawingml/2006/main" rot="0" flipH="0" flipV="0">
-              <a:off x="8631151" y="1123508"/>
-              <a:ext cx="2596787" cy="402767"/>
+              <a:off x="8631151" y="1350000"/>
+              <a:ext cx="2596787" cy="420000"/>
             </a:xfrm>
             <a:prstGeom xmlns:a="http://schemas.openxmlformats.org/drawingml/2006/main" prst="rect">
               <a:avLst/>
@@ -1742,7 +1502,7 @@
                 <a:buNone/>
               </a:pPr>
               <a:r>
-                <a:rPr sz="1300" i="1">
+                <a:rPr sz="1400" i="1">
                   <a:solidFill>
                     <a:srgbClr val="6B6B6B"/>
                   </a:solidFill>
@@ -1759,7 +1519,7 @@
                 <a:buNone/>
               </a:pPr>
               <a:r>
-                <a:rPr sz="1300" i="1">
+                <a:rPr sz="1400" i="1">
                   <a:solidFill>
                     <a:srgbClr val="6B6B6B"/>
                   </a:solidFill>
@@ -1775,7 +1535,7 @@
         </p:sp>
         <p:sp>
           <p:nvSpPr>
-            <p:cNvPr id="34" name="TextBox 34">
+            <p:cNvPr id="27" name="TextBox 34">
               <a:extLst xmlns:a="http://schemas.openxmlformats.org/drawingml/2006/main">
                 <a:ext uri="{FF2B5EF4-FFF2-40B4-BE49-F238E27FC236}">
                   <a16:creationId xmlns:a16="http://schemas.microsoft.com/office/drawing/2014/main" id="{F0C14BFD-AF40-4F14-8A1D-8C42530A51C8}"/>
@@ -1789,8 +1549,8 @@
           </p:nvSpPr>
           <p:spPr>
             <a:xfrm xmlns:a="http://schemas.openxmlformats.org/drawingml/2006/main" rot="0" flipH="0" flipV="0">
-              <a:off x="11863885" y="476961"/>
-              <a:ext cx="2596787" cy="582952"/>
+              <a:off x="11863885" y="580000"/>
+              <a:ext cx="2596787" cy="670000"/>
             </a:xfrm>
             <a:prstGeom xmlns:a="http://schemas.openxmlformats.org/drawingml/2006/main" prst="rect">
               <a:avLst/>
@@ -1810,7 +1570,7 @@
                 <a:buNone/>
               </a:pPr>
               <a:r>
-                <a:rPr sz="3100" b="1">
+                <a:rPr sz="2500" b="1">
                   <a:solidFill>
                     <a:srgbClr val="111111"/>
                   </a:solidFill>
@@ -1826,7 +1586,7 @@
         </p:sp>
         <p:sp>
           <p:nvSpPr>
-            <p:cNvPr id="35" name="TextBox 35">
+            <p:cNvPr id="28" name="TextBox 35">
               <a:extLst xmlns:a="http://schemas.openxmlformats.org/drawingml/2006/main">
                 <a:ext uri="{FF2B5EF4-FFF2-40B4-BE49-F238E27FC236}">
                   <a16:creationId xmlns:a16="http://schemas.microsoft.com/office/drawing/2014/main" id="{DC85EFCC-FCD6-418B-AC37-6648C21D5EB0}"/>
@@ -1840,8 +1600,8 @@
           </p:nvSpPr>
           <p:spPr>
             <a:xfrm xmlns:a="http://schemas.openxmlformats.org/drawingml/2006/main" rot="0" flipH="0" flipV="0">
-              <a:off x="11863885" y="1123508"/>
-              <a:ext cx="2596787" cy="402767"/>
+              <a:off x="11863885" y="1350000"/>
+              <a:ext cx="2596787" cy="420000"/>
             </a:xfrm>
             <a:prstGeom xmlns:a="http://schemas.openxmlformats.org/drawingml/2006/main" prst="rect">
               <a:avLst/>
@@ -1861,7 +1621,7 @@
                 <a:buNone/>
               </a:pPr>
               <a:r>
-                <a:rPr sz="1300" i="1">
+                <a:rPr sz="1400" i="1">
                   <a:solidFill>
                     <a:srgbClr val="6B6B6B"/>
                   </a:solidFill>
@@ -1878,7 +1638,7 @@
                 <a:buNone/>
               </a:pPr>
               <a:r>
-                <a:rPr sz="1300" i="1">
+                <a:rPr sz="1400" i="1">
                   <a:solidFill>
                     <a:srgbClr val="6B6B6B"/>
                   </a:solidFill>
@@ -1894,7 +1654,7 @@
         </p:sp>
         <p:sp>
           <p:nvSpPr>
-            <p:cNvPr id="36" name="TextBox 36">
+            <p:cNvPr id="29" name="TextBox 36">
               <a:extLst xmlns:a="http://schemas.openxmlformats.org/drawingml/2006/main">
                 <a:ext uri="{FF2B5EF4-FFF2-40B4-BE49-F238E27FC236}">
                   <a16:creationId xmlns:a16="http://schemas.microsoft.com/office/drawing/2014/main" id="{EFF893D6-585A-4082-90DE-FF082F6E8EC1}"/>
@@ -1908,7 +1668,7 @@
           </p:nvSpPr>
           <p:spPr>
             <a:xfrm xmlns:a="http://schemas.openxmlformats.org/drawingml/2006/main" rot="0" flipH="0" flipV="0">
-              <a:off x="2494255" y="2702778"/>
+              <a:off x="2494255" y="3150000"/>
               <a:ext cx="741939" cy="360370"/>
             </a:xfrm>
             <a:prstGeom xmlns:a="http://schemas.openxmlformats.org/drawingml/2006/main" prst="rect">
@@ -1945,7 +1705,7 @@
         </p:sp>
         <p:sp>
           <p:nvSpPr>
-            <p:cNvPr id="37" name="TextBox 37">
+            <p:cNvPr id="30" name="TextBox 37">
               <a:extLst xmlns:a="http://schemas.openxmlformats.org/drawingml/2006/main">
                 <a:ext uri="{FF2B5EF4-FFF2-40B4-BE49-F238E27FC236}">
                   <a16:creationId xmlns:a16="http://schemas.microsoft.com/office/drawing/2014/main" id="{6421D593-DB06-4147-B7FE-7BBBC34CAB12}"/>
@@ -1959,7 +1719,7 @@
           </p:nvSpPr>
           <p:spPr>
             <a:xfrm xmlns:a="http://schemas.openxmlformats.org/drawingml/2006/main" rot="0" flipH="0" flipV="0">
-              <a:off x="3882741" y="2702778"/>
+              <a:off x="3882741" y="3150000"/>
               <a:ext cx="1059913" cy="360370"/>
             </a:xfrm>
             <a:prstGeom xmlns:a="http://schemas.openxmlformats.org/drawingml/2006/main" prst="rect">
@@ -1980,7 +1740,7 @@
                 <a:buNone/>
               </a:pPr>
               <a:r>
-                <a:rPr sz="1160" i="1">
+                <a:rPr sz="1600" i="1">
                   <a:solidFill>
                     <a:srgbClr val="111111"/>
                   </a:solidFill>
@@ -1996,7 +1756,7 @@
         </p:sp>
         <p:sp>
           <p:nvSpPr>
-            <p:cNvPr id="38" name="TextBox 38">
+            <p:cNvPr id="31" name="TextBox 38">
               <a:extLst xmlns:a="http://schemas.openxmlformats.org/drawingml/2006/main">
                 <a:ext uri="{FF2B5EF4-FFF2-40B4-BE49-F238E27FC236}">
                   <a16:creationId xmlns:a16="http://schemas.microsoft.com/office/drawing/2014/main" id="{45BB36E8-4EE2-4448-BCB4-4A946612A3A1}"/>
@@ -2047,7 +1807,7 @@
         </p:sp>
         <p:sp>
           <p:nvSpPr>
-            <p:cNvPr id="39" name="TextBox 39">
+            <p:cNvPr id="32" name="TextBox 39">
               <a:extLst xmlns:a="http://schemas.openxmlformats.org/drawingml/2006/main">
                 <a:ext uri="{FF2B5EF4-FFF2-40B4-BE49-F238E27FC236}">
                   <a16:creationId xmlns:a16="http://schemas.microsoft.com/office/drawing/2014/main" id="{63E2CE3D-2B7C-4C6D-917B-F89BFB687E6C}"/>
@@ -2098,7 +1858,7 @@
         </p:sp>
         <p:sp>
           <p:nvSpPr>
-            <p:cNvPr id="40" name="TextBox 40">
+            <p:cNvPr id="33" name="TextBox 40">
               <a:extLst xmlns:a="http://schemas.openxmlformats.org/drawingml/2006/main">
                 <a:ext uri="{FF2B5EF4-FFF2-40B4-BE49-F238E27FC236}">
                   <a16:creationId xmlns:a16="http://schemas.microsoft.com/office/drawing/2014/main" id="{89744D25-D8A9-4033-BED8-7E66F708C425}"/>
@@ -2149,7 +1909,7 @@
         </p:sp>
         <p:sp>
           <p:nvSpPr>
-            <p:cNvPr id="41" name="TextBox 41">
+            <p:cNvPr id="34" name="TextBox 41">
               <a:extLst xmlns:a="http://schemas.openxmlformats.org/drawingml/2006/main">
                 <a:ext uri="{FF2B5EF4-FFF2-40B4-BE49-F238E27FC236}">
                   <a16:creationId xmlns:a16="http://schemas.microsoft.com/office/drawing/2014/main" id="{F8A1CD47-5B1F-4E0E-8607-2132F45A5C4C}"/>
@@ -2200,7 +1960,7 @@
         </p:sp>
         <p:sp>
           <p:nvSpPr>
-            <p:cNvPr id="42" name="TextBox 42">
+            <p:cNvPr id="35" name="TextBox 42">
               <a:extLst xmlns:a="http://schemas.openxmlformats.org/drawingml/2006/main">
                 <a:ext uri="{FF2B5EF4-FFF2-40B4-BE49-F238E27FC236}">
                   <a16:creationId xmlns:a16="http://schemas.microsoft.com/office/drawing/2014/main" id="{E6D705B2-581C-4031-89C7-F7CACF96B624}"/>
@@ -2251,7 +2011,7 @@
         </p:sp>
         <p:sp>
           <p:nvSpPr>
-            <p:cNvPr id="43" name="TextBox 43">
+            <p:cNvPr id="36" name="TextBox 43">
               <a:extLst xmlns:a="http://schemas.openxmlformats.org/drawingml/2006/main">
                 <a:ext uri="{FF2B5EF4-FFF2-40B4-BE49-F238E27FC236}">
                   <a16:creationId xmlns:a16="http://schemas.microsoft.com/office/drawing/2014/main" id="{6107071B-3A71-4AAF-BDB5-585D870ABE3E}"/>
@@ -2302,7 +2062,7 @@
         </p:sp>
         <p:sp>
           <p:nvSpPr>
-            <p:cNvPr id="44" name="TextBox 44">
+            <p:cNvPr id="37" name="TextBox 44">
               <a:extLst xmlns:a="http://schemas.openxmlformats.org/drawingml/2006/main">
                 <a:ext uri="{FF2B5EF4-FFF2-40B4-BE49-F238E27FC236}">
                   <a16:creationId xmlns:a16="http://schemas.microsoft.com/office/drawing/2014/main" id="{97B0DD3D-FF2E-4878-8A04-8148BD0D98ED}"/>
@@ -2353,7 +2113,7 @@
         </p:sp>
         <p:sp>
           <p:nvSpPr>
-            <p:cNvPr id="45" name="TextBox 45">
+            <p:cNvPr id="38" name="TextBox 45">
               <a:extLst xmlns:a="http://schemas.openxmlformats.org/drawingml/2006/main">
                 <a:ext uri="{FF2B5EF4-FFF2-40B4-BE49-F238E27FC236}">
                   <a16:creationId xmlns:a16="http://schemas.microsoft.com/office/drawing/2014/main" id="{B666113C-3DE4-4B12-9E7B-877A770FE52B}"/>
@@ -2367,7 +2127,7 @@
           </p:nvSpPr>
           <p:spPr>
             <a:xfrm xmlns:a="http://schemas.openxmlformats.org/drawingml/2006/main" rot="0" flipH="0" flipV="0">
-              <a:off x="5430214" y="3921678"/>
+              <a:off x="5430214" y="3700000"/>
               <a:ext cx="2543791" cy="360370"/>
             </a:xfrm>
             <a:prstGeom xmlns:a="http://schemas.openxmlformats.org/drawingml/2006/main" prst="rect">
@@ -2404,7 +2164,7 @@
         </p:sp>
         <p:sp>
           <p:nvSpPr>
-            <p:cNvPr id="46" name="TextBox 46">
+            <p:cNvPr id="39" name="TextBox 46">
               <a:extLst xmlns:a="http://schemas.openxmlformats.org/drawingml/2006/main">
                 <a:ext uri="{FF2B5EF4-FFF2-40B4-BE49-F238E27FC236}">
                   <a16:creationId xmlns:a16="http://schemas.microsoft.com/office/drawing/2014/main" id="{603DB104-7707-49B1-90A8-A0A7E766B288}"/>
@@ -2455,7 +2215,7 @@
         </p:sp>
         <p:sp>
           <p:nvSpPr>
-            <p:cNvPr id="47" name="TextBox 47">
+            <p:cNvPr id="40" name="TextBox 47">
               <a:extLst xmlns:a="http://schemas.openxmlformats.org/drawingml/2006/main">
                 <a:ext uri="{FF2B5EF4-FFF2-40B4-BE49-F238E27FC236}">
                   <a16:creationId xmlns:a16="http://schemas.microsoft.com/office/drawing/2014/main" id="{8766B3E4-EB04-4E69-AE5E-ABC51A021A14}"/>
@@ -2506,7 +2266,7 @@
         </p:sp>
         <p:sp>
           <p:nvSpPr>
-            <p:cNvPr id="48" name="TextBox 48">
+            <p:cNvPr id="41" name="TextBox 48">
               <a:extLst xmlns:a="http://schemas.openxmlformats.org/drawingml/2006/main">
                 <a:ext uri="{FF2B5EF4-FFF2-40B4-BE49-F238E27FC236}">
                   <a16:creationId xmlns:a16="http://schemas.microsoft.com/office/drawing/2014/main" id="{EE924DA1-1AC5-47D0-A0E4-A18E05593A61}"/>
@@ -2520,7 +2280,7 @@
           </p:nvSpPr>
           <p:spPr>
             <a:xfrm xmlns:a="http://schemas.openxmlformats.org/drawingml/2006/main" rot="0" flipH="0" flipV="0">
-              <a:off x="8874931" y="3964074"/>
+              <a:off x="8874931" y="3700000"/>
               <a:ext cx="2649782" cy="360370"/>
             </a:xfrm>
             <a:prstGeom xmlns:a="http://schemas.openxmlformats.org/drawingml/2006/main" prst="rect">
@@ -2557,7 +2317,7 @@
         </p:sp>
         <p:sp>
           <p:nvSpPr>
-            <p:cNvPr id="49" name="TextBox 49">
+            <p:cNvPr id="42" name="TextBox 49">
               <a:extLst xmlns:a="http://schemas.openxmlformats.org/drawingml/2006/main">
                 <a:ext uri="{FF2B5EF4-FFF2-40B4-BE49-F238E27FC236}">
                   <a16:creationId xmlns:a16="http://schemas.microsoft.com/office/drawing/2014/main" id="{A8744081-E079-4E37-B6BA-8F8BB184D555}"/>
@@ -2608,7 +2368,7 @@
         </p:sp>
         <p:sp>
           <p:nvSpPr>
-            <p:cNvPr id="50" name="TextBox 50">
+            <p:cNvPr id="43" name="TextBox 50">
               <a:extLst xmlns:a="http://schemas.openxmlformats.org/drawingml/2006/main">
                 <a:ext uri="{FF2B5EF4-FFF2-40B4-BE49-F238E27FC236}">
                   <a16:creationId xmlns:a16="http://schemas.microsoft.com/office/drawing/2014/main" id="{A2CAFC65-A212-4814-A3E7-FAA4806290A1}"/>
@@ -2622,8 +2382,8 @@
           </p:nvSpPr>
           <p:spPr>
             <a:xfrm xmlns:a="http://schemas.openxmlformats.org/drawingml/2006/main" rot="0" flipH="0" flipV="0">
-              <a:off x="9033918" y="7048421"/>
-              <a:ext cx="1801852" cy="360370"/>
+              <a:off x="8770000" y="7048421"/>
+              <a:ext cx="2600000" cy="360370"/>
             </a:xfrm>
             <a:prstGeom xmlns:a="http://schemas.openxmlformats.org/drawingml/2006/main" prst="rect">
               <a:avLst/>
@@ -2659,7 +2419,7 @@
         </p:sp>
         <p:sp>
           <p:nvSpPr>
-            <p:cNvPr id="51" name="TextBox 51">
+            <p:cNvPr id="44" name="TextBox 51">
               <a:extLst xmlns:a="http://schemas.openxmlformats.org/drawingml/2006/main">
                 <a:ext uri="{FF2B5EF4-FFF2-40B4-BE49-F238E27FC236}">
                   <a16:creationId xmlns:a16="http://schemas.microsoft.com/office/drawing/2014/main" id="{668A8CCC-C327-4057-A67D-DCBCAF564854}"/>
@@ -2673,7 +2433,7 @@
           </p:nvSpPr>
           <p:spPr>
             <a:xfrm xmlns:a="http://schemas.openxmlformats.org/drawingml/2006/main" rot="0" flipH="0" flipV="0">
-              <a:off x="11842687" y="2670981"/>
+              <a:off x="11842687" y="3150000"/>
               <a:ext cx="741939" cy="360370"/>
             </a:xfrm>
             <a:prstGeom xmlns:a="http://schemas.openxmlformats.org/drawingml/2006/main" prst="rect">
@@ -2710,7 +2470,7 @@
         </p:sp>
         <p:sp>
           <p:nvSpPr>
-            <p:cNvPr id="52" name="TextBox 52">
+            <p:cNvPr id="45" name="TextBox 52">
               <a:extLst xmlns:a="http://schemas.openxmlformats.org/drawingml/2006/main">
                 <a:ext uri="{FF2B5EF4-FFF2-40B4-BE49-F238E27FC236}">
                   <a16:creationId xmlns:a16="http://schemas.microsoft.com/office/drawing/2014/main" id="{7E8F5060-C3D2-4835-8864-16A70EFC348D}"/>
@@ -2724,7 +2484,7 @@
           </p:nvSpPr>
           <p:spPr>
             <a:xfrm xmlns:a="http://schemas.openxmlformats.org/drawingml/2006/main" rot="0" flipH="0" flipV="0">
-              <a:off x="12902600" y="2861765"/>
+              <a:off x="12902600" y="3150000"/>
               <a:ext cx="1589869" cy="508758"/>
             </a:xfrm>
             <a:prstGeom xmlns:a="http://schemas.openxmlformats.org/drawingml/2006/main" prst="rect">
@@ -2761,7 +2521,7 @@
         </p:sp>
         <p:sp>
           <p:nvSpPr>
-            <p:cNvPr id="53" name="TextBox 53">
+            <p:cNvPr id="46" name="TextBox 53">
               <a:extLst xmlns:a="http://schemas.openxmlformats.org/drawingml/2006/main">
                 <a:ext uri="{FF2B5EF4-FFF2-40B4-BE49-F238E27FC236}">
                   <a16:creationId xmlns:a16="http://schemas.microsoft.com/office/drawing/2014/main" id="{EA50E358-F446-4D86-BDF8-DC5E073098AE}"/>
@@ -2812,7 +2572,7 @@
         </p:sp>
         <p:sp>
           <p:nvSpPr>
-            <p:cNvPr id="54" name="TextBox 54">
+            <p:cNvPr id="47" name="TextBox 54">
               <a:extLst xmlns:a="http://schemas.openxmlformats.org/drawingml/2006/main">
                 <a:ext uri="{FF2B5EF4-FFF2-40B4-BE49-F238E27FC236}">
                   <a16:creationId xmlns:a16="http://schemas.microsoft.com/office/drawing/2014/main" id="{F5855610-5DA9-4E46-855D-332EE6950613}"/>
@@ -2847,7 +2607,7 @@
                 <a:buNone/>
               </a:pPr>
               <a:r>
-                <a:rPr sz="1160" i="1">
+                <a:rPr sz="1600" i="1">
                   <a:solidFill>
                     <a:srgbClr val="555555"/>
                   </a:solidFill>
@@ -2863,7 +2623,7 @@
         </p:sp>
         <p:sp>
           <p:nvSpPr>
-            <p:cNvPr id="55" name="TextBox 55">
+            <p:cNvPr id="48" name="TextBox 55">
               <a:extLst xmlns:a="http://schemas.openxmlformats.org/drawingml/2006/main">
                 <a:ext uri="{FF2B5EF4-FFF2-40B4-BE49-F238E27FC236}">
                   <a16:creationId xmlns:a16="http://schemas.microsoft.com/office/drawing/2014/main" id="{27678E7C-E9A8-4F09-BD63-BC992296E5BF}"/>
@@ -2914,7 +2674,7 @@
         </p:sp>
         <p:sp>
           <p:nvSpPr>
-            <p:cNvPr id="56" name="TextBox 56">
+            <p:cNvPr id="49" name="TextBox 56">
               <a:extLst xmlns:a="http://schemas.openxmlformats.org/drawingml/2006/main">
                 <a:ext uri="{FF2B5EF4-FFF2-40B4-BE49-F238E27FC236}">
                   <a16:creationId xmlns:a16="http://schemas.microsoft.com/office/drawing/2014/main" id="{EE52EB24-6097-4986-96DE-01031EF8E4B2}"/>
@@ -2965,7 +2725,7 @@
         </p:sp>
         <p:sp>
           <p:nvSpPr>
-            <p:cNvPr id="57" name="TextBox 57">
+            <p:cNvPr id="50" name="TextBox 57">
               <a:extLst xmlns:a="http://schemas.openxmlformats.org/drawingml/2006/main">
                 <a:ext uri="{FF2B5EF4-FFF2-40B4-BE49-F238E27FC236}">
                   <a16:creationId xmlns:a16="http://schemas.microsoft.com/office/drawing/2014/main" id="{D629858E-FB13-47A5-97D6-AB08E58B908C}"/>
@@ -3016,7 +2776,7 @@
         </p:sp>
         <p:sp>
           <p:nvSpPr>
-            <p:cNvPr id="58" name="TextBox 58">
+            <p:cNvPr id="51" name="TextBox 58">
               <a:extLst xmlns:a="http://schemas.openxmlformats.org/drawingml/2006/main">
                 <a:ext uri="{FF2B5EF4-FFF2-40B4-BE49-F238E27FC236}">
                   <a16:creationId xmlns:a16="http://schemas.microsoft.com/office/drawing/2014/main" id="{B371695D-7E57-4EE2-9D4F-37E91C5EDC81}"/>
@@ -3067,7 +2827,7 @@
         </p:sp>
         <p:sp>
           <p:nvSpPr>
-            <p:cNvPr id="59" name="TextBox 59">
+            <p:cNvPr id="52" name="TextBox 59">
               <a:extLst xmlns:a="http://schemas.openxmlformats.org/drawingml/2006/main">
                 <a:ext uri="{FF2B5EF4-FFF2-40B4-BE49-F238E27FC236}">
                   <a16:creationId xmlns:a16="http://schemas.microsoft.com/office/drawing/2014/main" id="{57D98FDA-0589-4FDE-9D30-A5EFEB2DE147}"/>
@@ -3118,7 +2878,7 @@
         </p:sp>
         <p:sp>
           <p:nvSpPr>
-            <p:cNvPr id="60" name="TextBox 60">
+            <p:cNvPr id="53" name="TextBox 60">
               <a:extLst xmlns:a="http://schemas.openxmlformats.org/drawingml/2006/main">
                 <a:ext uri="{FF2B5EF4-FFF2-40B4-BE49-F238E27FC236}">
                   <a16:creationId xmlns:a16="http://schemas.microsoft.com/office/drawing/2014/main" id="{6067EF63-8AE3-48C0-B87C-EF32F35828F8}"/>
@@ -3169,7 +2929,7 @@
         </p:sp>
         <p:sp>
           <p:nvSpPr>
-            <p:cNvPr id="61" name="TextBox 61">
+            <p:cNvPr id="54" name="TextBox 61">
               <a:extLst xmlns:a="http://schemas.openxmlformats.org/drawingml/2006/main">
                 <a:ext uri="{FF2B5EF4-FFF2-40B4-BE49-F238E27FC236}">
                   <a16:creationId xmlns:a16="http://schemas.microsoft.com/office/drawing/2014/main" id="{020E7366-2561-440D-8002-1C10A4B8D766}"/>
@@ -3220,7 +2980,7 @@
         </p:sp>
         <p:sp>
           <p:nvSpPr>
-            <p:cNvPr id="62" name="TextBox 62">
+            <p:cNvPr id="55" name="TextBox 62">
               <a:extLst xmlns:a="http://schemas.openxmlformats.org/drawingml/2006/main">
                 <a:ext uri="{FF2B5EF4-FFF2-40B4-BE49-F238E27FC236}">
                   <a16:creationId xmlns:a16="http://schemas.microsoft.com/office/drawing/2014/main" id="{92E6B0AD-BFA7-472F-B2BF-51599FC21315}"/>
@@ -3271,7 +3031,7 @@
         </p:sp>
         <p:sp>
           <p:nvSpPr>
-            <p:cNvPr id="63" name="TextBox 63">
+            <p:cNvPr id="56" name="TextBox 63">
               <a:extLst xmlns:a="http://schemas.openxmlformats.org/drawingml/2006/main">
                 <a:ext uri="{FF2B5EF4-FFF2-40B4-BE49-F238E27FC236}">
                   <a16:creationId xmlns:a16="http://schemas.microsoft.com/office/drawing/2014/main" id="{0F1C4ED2-332A-4E97-889F-0DD91227E0A5}"/>
@@ -3322,7 +3082,7 @@
         </p:sp>
         <p:sp>
           <p:nvSpPr>
-            <p:cNvPr id="64" name="TextBox 64">
+            <p:cNvPr id="57" name="TextBox 64">
               <a:extLst xmlns:a="http://schemas.openxmlformats.org/drawingml/2006/main">
                 <a:ext uri="{FF2B5EF4-FFF2-40B4-BE49-F238E27FC236}">
                   <a16:creationId xmlns:a16="http://schemas.microsoft.com/office/drawing/2014/main" id="{53646A9D-7025-4432-BCF1-5EF9A00A3278}"/>
@@ -3373,7 +3133,7 @@
         </p:sp>
         <p:sp>
           <p:nvSpPr>
-            <p:cNvPr id="65" name="TextBox 65">
+            <p:cNvPr id="58" name="TextBox 65">
               <a:extLst xmlns:a="http://schemas.openxmlformats.org/drawingml/2006/main">
                 <a:ext uri="{FF2B5EF4-FFF2-40B4-BE49-F238E27FC236}">
                   <a16:creationId xmlns:a16="http://schemas.microsoft.com/office/drawing/2014/main" id="{FF191263-542E-437A-860F-CC8A92AD8E50}"/>
@@ -3424,7 +3184,7 @@
         </p:sp>
         <p:sp>
           <p:nvSpPr>
-            <p:cNvPr id="66" name="TextBox 66">
+            <p:cNvPr id="59" name="TextBox 66">
               <a:extLst xmlns:a="http://schemas.openxmlformats.org/drawingml/2006/main">
                 <a:ext uri="{FF2B5EF4-FFF2-40B4-BE49-F238E27FC236}">
                   <a16:creationId xmlns:a16="http://schemas.microsoft.com/office/drawing/2014/main" id="{B5744C7E-9726-4DF2-BCD3-D16F7DB5925E}"/>
@@ -3475,7 +3235,7 @@
         </p:sp>
         <p:sp>
           <p:nvSpPr>
-            <p:cNvPr id="67" name="TextBox 67">
+            <p:cNvPr id="60" name="TextBox 67">
               <a:extLst xmlns:a="http://schemas.openxmlformats.org/drawingml/2006/main">
                 <a:ext uri="{FF2B5EF4-FFF2-40B4-BE49-F238E27FC236}">
                   <a16:creationId xmlns:a16="http://schemas.microsoft.com/office/drawing/2014/main" id="{F2C06AE6-4A31-4F25-83C3-7D203DA6D47D}"/>
@@ -3523,6 +3283,2873 @@
               <a:endParaRPr sz="1400"/>
             </a:p>
           </p:txBody>
+        </p:sp>
+        <p:cxnSp>
+          <p:nvCxnSpPr>
+            <p:cNvPr id="61" name="">
+              <a:extLst xmlns:a="http://schemas.openxmlformats.org/drawingml/2006/main">
+                <a:ext uri="{FF2B5EF4-FFF2-40B4-BE49-F238E27FC236}">
+                  <a16:creationId xmlns:a16="http://schemas.microsoft.com/office/drawing/2014/main" id="{4BC60A2B-26B1-4AF4-919E-170D9EB93BDB}"/>
+                </a:ext>
+              </a:extLst>
+            </p:cNvPr>
+            <p:cNvCxnSpPr>
+              <a:stCxn xmlns:a="http://schemas.openxmlformats.org/drawingml/2006/main" id="107" idx="3"/>
+              <a:endCxn xmlns:a="http://schemas.openxmlformats.org/drawingml/2006/main" id="109" idx="1"/>
+            </p:cNvCxnSpPr>
+            <p:nvPr/>
+          </p:nvCxnSpPr>
+          <p:spPr>
+            <a:xfrm xmlns:a="http://schemas.openxmlformats.org/drawingml/2006/main">
+              <a:off x="12782550" y="2333625"/>
+              <a:ext cx="647700" cy="442913"/>
+            </a:xfrm>
+            <a:prstGeom xmlns:a="http://schemas.openxmlformats.org/drawingml/2006/main" prst="straightConnector1">
+              <a:avLst/>
+            </a:prstGeom>
+            <a:ln xmlns:a="http://schemas.openxmlformats.org/drawingml/2006/main" w="19050">
+              <a:solidFill>
+                <a:srgbClr val="6E65A0"/>
+              </a:solidFill>
+              <a:headEnd type="none" w="med" len="med"/>
+            </a:ln>
+          </p:spPr>
+        </p:cxnSp>
+        <p:cxnSp>
+          <p:nvCxnSpPr>
+            <p:cNvPr id="62" name="">
+              <a:extLst xmlns:a="http://schemas.openxmlformats.org/drawingml/2006/main">
+                <a:ext uri="{FF2B5EF4-FFF2-40B4-BE49-F238E27FC236}">
+                  <a16:creationId xmlns:a16="http://schemas.microsoft.com/office/drawing/2014/main" id="{B03ABC04-EF60-47FC-8F8B-EDE2B31339F0}"/>
+                </a:ext>
+              </a:extLst>
+            </p:cNvPr>
+            <p:cNvCxnSpPr>
+              <a:stCxn xmlns:a="http://schemas.openxmlformats.org/drawingml/2006/main" id="107" idx="3"/>
+              <a:endCxn xmlns:a="http://schemas.openxmlformats.org/drawingml/2006/main" id="108" idx="1"/>
+            </p:cNvCxnSpPr>
+            <p:nvPr/>
+          </p:nvCxnSpPr>
+          <p:spPr>
+            <a:xfrm xmlns:a="http://schemas.openxmlformats.org/drawingml/2006/main" flipV="1">
+              <a:off x="12782550" y="2147888"/>
+              <a:ext cx="647700" cy="185738"/>
+            </a:xfrm>
+            <a:prstGeom xmlns:a="http://schemas.openxmlformats.org/drawingml/2006/main" prst="straightConnector1">
+              <a:avLst/>
+            </a:prstGeom>
+            <a:ln xmlns:a="http://schemas.openxmlformats.org/drawingml/2006/main" w="19050">
+              <a:solidFill>
+                <a:srgbClr val="6E65A0"/>
+              </a:solidFill>
+              <a:headEnd type="none" w="med" len="med"/>
+            </a:ln>
+          </p:spPr>
+        </p:cxnSp>
+        <p:sp>
+          <p:nvSpPr>
+            <p:cNvPr id="63" name="forecast-input">
+              <a:extLst xmlns:a="http://schemas.openxmlformats.org/drawingml/2006/main">
+                <a:ext uri="{FF2B5EF4-FFF2-40B4-BE49-F238E27FC236}">
+                  <a16:creationId xmlns:a16="http://schemas.microsoft.com/office/drawing/2014/main" id="{B4FD6AB2-0AC6-4C2D-BC74-4341ADF3225F}"/>
+                </a:ext>
+              </a:extLst>
+            </p:cNvPr>
+            <p:cNvSpPr>
+              <a:spLocks xmlns:a="http://schemas.openxmlformats.org/drawingml/2006/main" noGrp="1"/>
+            </p:cNvSpPr>
+            <p:nvPr/>
+          </p:nvSpPr>
+          <p:spPr>
+            <a:xfrm xmlns:a="http://schemas.openxmlformats.org/drawingml/2006/main" flipV="0">
+              <a:off x="2809875" y="2143125"/>
+              <a:ext cx="95" cy="762000"/>
+            </a:xfrm>
+            <a:prstGeom xmlns:a="http://schemas.openxmlformats.org/drawingml/2006/main" prst="line">
+              <a:avLst/>
+            </a:prstGeom>
+            <a:noFill xmlns:a="http://schemas.openxmlformats.org/drawingml/2006/main"/>
+            <a:ln xmlns:a="http://schemas.openxmlformats.org/drawingml/2006/main" w="9525">
+              <a:solidFill>
+                <a:srgbClr val="747B80"/>
+              </a:solidFill>
+            </a:ln>
+          </p:spPr>
+        </p:sp>
+        <p:sp>
+          <p:nvSpPr>
+            <p:cNvPr id="64" name="forecast-input">
+              <a:extLst xmlns:a="http://schemas.openxmlformats.org/drawingml/2006/main">
+                <a:ext uri="{FF2B5EF4-FFF2-40B4-BE49-F238E27FC236}">
+                  <a16:creationId xmlns:a16="http://schemas.microsoft.com/office/drawing/2014/main" id="{45E6F77F-A755-4166-8E8D-4E89A79C6026}"/>
+                </a:ext>
+              </a:extLst>
+            </p:cNvPr>
+            <p:cNvSpPr>
+              <a:spLocks xmlns:a="http://schemas.openxmlformats.org/drawingml/2006/main" noGrp="1"/>
+            </p:cNvSpPr>
+            <p:nvPr/>
+          </p:nvSpPr>
+          <p:spPr>
+            <a:xfrm xmlns:a="http://schemas.openxmlformats.org/drawingml/2006/main" flipV="0">
+              <a:off x="2809875" y="2905125"/>
+              <a:ext cx="1666875" cy="95"/>
+            </a:xfrm>
+            <a:prstGeom xmlns:a="http://schemas.openxmlformats.org/drawingml/2006/main" prst="line">
+              <a:avLst/>
+            </a:prstGeom>
+            <a:noFill xmlns:a="http://schemas.openxmlformats.org/drawingml/2006/main"/>
+            <a:ln xmlns:a="http://schemas.openxmlformats.org/drawingml/2006/main" w="9525">
+              <a:solidFill>
+                <a:srgbClr val="747B80"/>
+              </a:solidFill>
+            </a:ln>
+          </p:spPr>
+        </p:sp>
+        <p:sp>
+          <p:nvSpPr>
+            <p:cNvPr id="65" name="forecast-input">
+              <a:extLst xmlns:a="http://schemas.openxmlformats.org/drawingml/2006/main">
+                <a:ext uri="{FF2B5EF4-FFF2-40B4-BE49-F238E27FC236}">
+                  <a16:creationId xmlns:a16="http://schemas.microsoft.com/office/drawing/2014/main" id="{2873F1F8-A440-4716-8A92-505374BA3A69}"/>
+                </a:ext>
+              </a:extLst>
+            </p:cNvPr>
+            <p:cNvSpPr>
+              <a:spLocks xmlns:a="http://schemas.openxmlformats.org/drawingml/2006/main" noGrp="1"/>
+            </p:cNvSpPr>
+            <p:nvPr/>
+          </p:nvSpPr>
+          <p:spPr>
+            <a:xfrm xmlns:a="http://schemas.openxmlformats.org/drawingml/2006/main" flipV="1">
+              <a:off x="2809875" y="2600325"/>
+              <a:ext cx="238125" cy="76200"/>
+            </a:xfrm>
+            <a:prstGeom xmlns:a="http://schemas.openxmlformats.org/drawingml/2006/main" prst="line">
+              <a:avLst/>
+            </a:prstGeom>
+            <a:noFill xmlns:a="http://schemas.openxmlformats.org/drawingml/2006/main"/>
+            <a:ln xmlns:a="http://schemas.openxmlformats.org/drawingml/2006/main" w="24765">
+              <a:solidFill>
+                <a:srgbClr val="355F75"/>
+              </a:solidFill>
+            </a:ln>
+          </p:spPr>
+        </p:sp>
+        <p:sp>
+          <p:nvSpPr>
+            <p:cNvPr id="66" name="forecast-input">
+              <a:extLst xmlns:a="http://schemas.openxmlformats.org/drawingml/2006/main">
+                <a:ext uri="{FF2B5EF4-FFF2-40B4-BE49-F238E27FC236}">
+                  <a16:creationId xmlns:a16="http://schemas.microsoft.com/office/drawing/2014/main" id="{D354883A-3068-4021-AA9C-CD43ED82B710}"/>
+                </a:ext>
+              </a:extLst>
+            </p:cNvPr>
+            <p:cNvSpPr>
+              <a:spLocks xmlns:a="http://schemas.openxmlformats.org/drawingml/2006/main" noGrp="1"/>
+            </p:cNvSpPr>
+            <p:nvPr/>
+          </p:nvSpPr>
+          <p:spPr>
+            <a:xfrm xmlns:a="http://schemas.openxmlformats.org/drawingml/2006/main" flipV="0">
+              <a:off x="3048000" y="2600325"/>
+              <a:ext cx="238125" cy="114300"/>
+            </a:xfrm>
+            <a:prstGeom xmlns:a="http://schemas.openxmlformats.org/drawingml/2006/main" prst="line">
+              <a:avLst/>
+            </a:prstGeom>
+            <a:noFill xmlns:a="http://schemas.openxmlformats.org/drawingml/2006/main"/>
+            <a:ln xmlns:a="http://schemas.openxmlformats.org/drawingml/2006/main" w="24765">
+              <a:solidFill>
+                <a:srgbClr val="355F75"/>
+              </a:solidFill>
+            </a:ln>
+          </p:spPr>
+        </p:sp>
+        <p:sp>
+          <p:nvSpPr>
+            <p:cNvPr id="67" name="forecast-input">
+              <a:extLst xmlns:a="http://schemas.openxmlformats.org/drawingml/2006/main">
+                <a:ext uri="{FF2B5EF4-FFF2-40B4-BE49-F238E27FC236}">
+                  <a16:creationId xmlns:a16="http://schemas.microsoft.com/office/drawing/2014/main" id="{51C93D15-480F-4DE2-8253-8FE2D6302943}"/>
+                </a:ext>
+              </a:extLst>
+            </p:cNvPr>
+            <p:cNvSpPr>
+              <a:spLocks xmlns:a="http://schemas.openxmlformats.org/drawingml/2006/main" noGrp="1"/>
+            </p:cNvSpPr>
+            <p:nvPr/>
+          </p:nvSpPr>
+          <p:spPr>
+            <a:xfrm xmlns:a="http://schemas.openxmlformats.org/drawingml/2006/main" flipV="1">
+              <a:off x="3286125" y="2638425"/>
+              <a:ext cx="238125" cy="76200"/>
+            </a:xfrm>
+            <a:prstGeom xmlns:a="http://schemas.openxmlformats.org/drawingml/2006/main" prst="line">
+              <a:avLst/>
+            </a:prstGeom>
+            <a:noFill xmlns:a="http://schemas.openxmlformats.org/drawingml/2006/main"/>
+            <a:ln xmlns:a="http://schemas.openxmlformats.org/drawingml/2006/main" w="24765">
+              <a:solidFill>
+                <a:srgbClr val="355F75"/>
+              </a:solidFill>
+            </a:ln>
+          </p:spPr>
+        </p:sp>
+        <p:sp>
+          <p:nvSpPr>
+            <p:cNvPr id="68" name="forecast-input">
+              <a:extLst xmlns:a="http://schemas.openxmlformats.org/drawingml/2006/main">
+                <a:ext uri="{FF2B5EF4-FFF2-40B4-BE49-F238E27FC236}">
+                  <a16:creationId xmlns:a16="http://schemas.microsoft.com/office/drawing/2014/main" id="{3786C98A-6566-41E6-9605-5E8D8CA96857}"/>
+                </a:ext>
+              </a:extLst>
+            </p:cNvPr>
+            <p:cNvSpPr>
+              <a:spLocks xmlns:a="http://schemas.openxmlformats.org/drawingml/2006/main" noGrp="1"/>
+            </p:cNvSpPr>
+            <p:nvPr/>
+          </p:nvSpPr>
+          <p:spPr>
+            <a:xfrm xmlns:a="http://schemas.openxmlformats.org/drawingml/2006/main" flipV="1">
+              <a:off x="3524250" y="2524125"/>
+              <a:ext cx="238125" cy="114300"/>
+            </a:xfrm>
+            <a:prstGeom xmlns:a="http://schemas.openxmlformats.org/drawingml/2006/main" prst="line">
+              <a:avLst/>
+            </a:prstGeom>
+            <a:noFill xmlns:a="http://schemas.openxmlformats.org/drawingml/2006/main"/>
+            <a:ln xmlns:a="http://schemas.openxmlformats.org/drawingml/2006/main" w="24765">
+              <a:solidFill>
+                <a:srgbClr val="355F75"/>
+              </a:solidFill>
+            </a:ln>
+          </p:spPr>
+        </p:sp>
+        <p:sp>
+          <p:nvSpPr>
+            <p:cNvPr id="69" name="forecast-input">
+              <a:extLst xmlns:a="http://schemas.openxmlformats.org/drawingml/2006/main">
+                <a:ext uri="{FF2B5EF4-FFF2-40B4-BE49-F238E27FC236}">
+                  <a16:creationId xmlns:a16="http://schemas.microsoft.com/office/drawing/2014/main" id="{8313D765-F0A6-4F75-9A4A-24A565704B28}"/>
+                </a:ext>
+              </a:extLst>
+            </p:cNvPr>
+            <p:cNvSpPr>
+              <a:spLocks xmlns:a="http://schemas.openxmlformats.org/drawingml/2006/main" noGrp="1"/>
+            </p:cNvSpPr>
+            <p:nvPr/>
+          </p:nvSpPr>
+          <p:spPr>
+            <a:xfrm xmlns:a="http://schemas.openxmlformats.org/drawingml/2006/main" flipV="0">
+              <a:off x="3762375" y="2524125"/>
+              <a:ext cx="238125" cy="38100"/>
+            </a:xfrm>
+            <a:prstGeom xmlns:a="http://schemas.openxmlformats.org/drawingml/2006/main" prst="line">
+              <a:avLst/>
+            </a:prstGeom>
+            <a:noFill xmlns:a="http://schemas.openxmlformats.org/drawingml/2006/main"/>
+            <a:ln xmlns:a="http://schemas.openxmlformats.org/drawingml/2006/main" w="24765">
+              <a:solidFill>
+                <a:srgbClr val="355F75"/>
+              </a:solidFill>
+            </a:ln>
+          </p:spPr>
+        </p:sp>
+        <p:sp>
+          <p:nvSpPr>
+            <p:cNvPr id="70" name="forecast-input">
+              <a:extLst xmlns:a="http://schemas.openxmlformats.org/drawingml/2006/main">
+                <a:ext uri="{FF2B5EF4-FFF2-40B4-BE49-F238E27FC236}">
+                  <a16:creationId xmlns:a16="http://schemas.microsoft.com/office/drawing/2014/main" id="{7CDDCA5E-8BFA-466D-A2F9-283F63526963}"/>
+                </a:ext>
+              </a:extLst>
+            </p:cNvPr>
+            <p:cNvSpPr>
+              <a:spLocks xmlns:a="http://schemas.openxmlformats.org/drawingml/2006/main" noGrp="1"/>
+            </p:cNvSpPr>
+            <p:nvPr/>
+          </p:nvSpPr>
+          <p:spPr>
+            <a:xfrm xmlns:a="http://schemas.openxmlformats.org/drawingml/2006/main" flipV="1">
+              <a:off x="4000500" y="2409825"/>
+              <a:ext cx="238125" cy="152400"/>
+            </a:xfrm>
+            <a:prstGeom xmlns:a="http://schemas.openxmlformats.org/drawingml/2006/main" prst="line">
+              <a:avLst/>
+            </a:prstGeom>
+            <a:noFill xmlns:a="http://schemas.openxmlformats.org/drawingml/2006/main"/>
+            <a:ln xmlns:a="http://schemas.openxmlformats.org/drawingml/2006/main" w="24765">
+              <a:solidFill>
+                <a:srgbClr val="355F75"/>
+              </a:solidFill>
+            </a:ln>
+          </p:spPr>
+        </p:sp>
+        <p:sp>
+          <p:nvSpPr>
+            <p:cNvPr id="71" name="forecast-input">
+              <a:extLst xmlns:a="http://schemas.openxmlformats.org/drawingml/2006/main">
+                <a:ext uri="{FF2B5EF4-FFF2-40B4-BE49-F238E27FC236}">
+                  <a16:creationId xmlns:a16="http://schemas.microsoft.com/office/drawing/2014/main" id="{30FD24E8-06B3-4628-9C17-800497EAA697}"/>
+                </a:ext>
+              </a:extLst>
+            </p:cNvPr>
+            <p:cNvSpPr>
+              <a:spLocks xmlns:a="http://schemas.openxmlformats.org/drawingml/2006/main" noGrp="1"/>
+            </p:cNvSpPr>
+            <p:nvPr/>
+          </p:nvSpPr>
+          <p:spPr>
+            <a:xfrm xmlns:a="http://schemas.openxmlformats.org/drawingml/2006/main" flipV="0">
+              <a:off x="4238625" y="2409825"/>
+              <a:ext cx="238125" cy="38100"/>
+            </a:xfrm>
+            <a:prstGeom xmlns:a="http://schemas.openxmlformats.org/drawingml/2006/main" prst="line">
+              <a:avLst/>
+            </a:prstGeom>
+            <a:noFill xmlns:a="http://schemas.openxmlformats.org/drawingml/2006/main"/>
+            <a:ln xmlns:a="http://schemas.openxmlformats.org/drawingml/2006/main" w="24765">
+              <a:solidFill>
+                <a:srgbClr val="355F75"/>
+              </a:solidFill>
+            </a:ln>
+          </p:spPr>
+        </p:sp>
+        <p:sp>
+          <p:nvSpPr>
+            <p:cNvPr id="72" name="forecast-input">
+              <a:extLst xmlns:a="http://schemas.openxmlformats.org/drawingml/2006/main">
+                <a:ext uri="{FF2B5EF4-FFF2-40B4-BE49-F238E27FC236}">
+                  <a16:creationId xmlns:a16="http://schemas.microsoft.com/office/drawing/2014/main" id="{7282CA0C-25D7-4790-83F7-04E7B4F69DE1}"/>
+                </a:ext>
+              </a:extLst>
+            </p:cNvPr>
+            <p:cNvSpPr>
+              <a:spLocks xmlns:a="http://schemas.openxmlformats.org/drawingml/2006/main" noGrp="1"/>
+            </p:cNvSpPr>
+            <p:nvPr/>
+          </p:nvSpPr>
+          <p:spPr>
+            <a:xfrm xmlns:a="http://schemas.openxmlformats.org/drawingml/2006/main" flipV="0">
+              <a:off x="4476750" y="2143125"/>
+              <a:ext cx="95" cy="762000"/>
+            </a:xfrm>
+            <a:prstGeom xmlns:a="http://schemas.openxmlformats.org/drawingml/2006/main" prst="line">
+              <a:avLst/>
+            </a:prstGeom>
+            <a:noFill xmlns:a="http://schemas.openxmlformats.org/drawingml/2006/main"/>
+            <a:ln xmlns:a="http://schemas.openxmlformats.org/drawingml/2006/main" w="9525">
+              <a:solidFill>
+                <a:srgbClr val="949494"/>
+              </a:solidFill>
+            </a:ln>
+          </p:spPr>
+        </p:sp>
+        <p:sp>
+          <p:nvSpPr>
+            <p:cNvPr id="73" name="forecast-input">
+              <a:extLst xmlns:a="http://schemas.openxmlformats.org/drawingml/2006/main">
+                <a:ext uri="{FF2B5EF4-FFF2-40B4-BE49-F238E27FC236}">
+                  <a16:creationId xmlns:a16="http://schemas.microsoft.com/office/drawing/2014/main" id="{E46F6D56-0AF0-4282-96DD-15107CEDCFE5}"/>
+                </a:ext>
+              </a:extLst>
+            </p:cNvPr>
+            <p:cNvSpPr>
+              <a:spLocks xmlns:a="http://schemas.openxmlformats.org/drawingml/2006/main" noGrp="1"/>
+            </p:cNvSpPr>
+            <p:nvPr/>
+          </p:nvSpPr>
+          <p:spPr>
+            <a:xfrm xmlns:a="http://schemas.openxmlformats.org/drawingml/2006/main" flipV="1">
+              <a:off x="4476750" y="2295525"/>
+              <a:ext cx="142875" cy="152400"/>
+            </a:xfrm>
+            <a:prstGeom xmlns:a="http://schemas.openxmlformats.org/drawingml/2006/main" prst="line">
+              <a:avLst/>
+            </a:prstGeom>
+            <a:noFill xmlns:a="http://schemas.openxmlformats.org/drawingml/2006/main"/>
+            <a:ln xmlns:a="http://schemas.openxmlformats.org/drawingml/2006/main" w="24765">
+              <a:solidFill>
+                <a:srgbClr val="C79138"/>
+              </a:solidFill>
+            </a:ln>
+          </p:spPr>
+        </p:sp>
+        <p:sp>
+          <p:nvSpPr>
+            <p:cNvPr id="74" name="forecast-input">
+              <a:extLst xmlns:a="http://schemas.openxmlformats.org/drawingml/2006/main">
+                <a:ext uri="{FF2B5EF4-FFF2-40B4-BE49-F238E27FC236}">
+                  <a16:creationId xmlns:a16="http://schemas.microsoft.com/office/drawing/2014/main" id="{4FB0308B-56CC-4F0C-A5B5-D3FBC8FC2704}"/>
+                </a:ext>
+              </a:extLst>
+            </p:cNvPr>
+            <p:cNvSpPr>
+              <a:spLocks xmlns:a="http://schemas.openxmlformats.org/drawingml/2006/main" noGrp="1"/>
+            </p:cNvSpPr>
+            <p:nvPr/>
+          </p:nvSpPr>
+          <p:spPr>
+            <a:xfrm xmlns:a="http://schemas.openxmlformats.org/drawingml/2006/main" flipV="0">
+              <a:off x="4619625" y="2295525"/>
+              <a:ext cx="142875" cy="76200"/>
+            </a:xfrm>
+            <a:prstGeom xmlns:a="http://schemas.openxmlformats.org/drawingml/2006/main" prst="line">
+              <a:avLst/>
+            </a:prstGeom>
+            <a:noFill xmlns:a="http://schemas.openxmlformats.org/drawingml/2006/main"/>
+            <a:ln xmlns:a="http://schemas.openxmlformats.org/drawingml/2006/main" w="24765">
+              <a:solidFill>
+                <a:srgbClr val="C79138"/>
+              </a:solidFill>
+            </a:ln>
+          </p:spPr>
+        </p:sp>
+        <p:sp>
+          <p:nvSpPr>
+            <p:cNvPr id="75" name="synthesis-input">
+              <a:extLst xmlns:a="http://schemas.openxmlformats.org/drawingml/2006/main">
+                <a:ext uri="{FF2B5EF4-FFF2-40B4-BE49-F238E27FC236}">
+                  <a16:creationId xmlns:a16="http://schemas.microsoft.com/office/drawing/2014/main" id="{23B2BDED-E01E-4815-AFFD-E521256B09F3}"/>
+                </a:ext>
+              </a:extLst>
+            </p:cNvPr>
+            <p:cNvSpPr>
+              <a:spLocks xmlns:a="http://schemas.openxmlformats.org/drawingml/2006/main" noGrp="1"/>
+            </p:cNvSpPr>
+            <p:nvPr/>
+          </p:nvSpPr>
+          <p:spPr>
+            <a:xfrm xmlns:a="http://schemas.openxmlformats.org/drawingml/2006/main" flipV="1">
+              <a:off x="5953125" y="2331244"/>
+              <a:ext cx="217714" cy="50006"/>
+            </a:xfrm>
+            <a:prstGeom xmlns:a="http://schemas.openxmlformats.org/drawingml/2006/main" prst="line">
+              <a:avLst/>
+            </a:prstGeom>
+            <a:noFill xmlns:a="http://schemas.openxmlformats.org/drawingml/2006/main"/>
+            <a:ln xmlns:a="http://schemas.openxmlformats.org/drawingml/2006/main" w="24765">
+              <a:solidFill>
+                <a:srgbClr val="3D896D"/>
+              </a:solidFill>
+            </a:ln>
+          </p:spPr>
+        </p:sp>
+        <p:sp>
+          <p:nvSpPr>
+            <p:cNvPr id="76" name="synthesis-input">
+              <a:extLst xmlns:a="http://schemas.openxmlformats.org/drawingml/2006/main">
+                <a:ext uri="{FF2B5EF4-FFF2-40B4-BE49-F238E27FC236}">
+                  <a16:creationId xmlns:a16="http://schemas.microsoft.com/office/drawing/2014/main" id="{B34FC5F4-803E-4385-A601-FF9728E80F93}"/>
+                </a:ext>
+              </a:extLst>
+            </p:cNvPr>
+            <p:cNvSpPr>
+              <a:spLocks xmlns:a="http://schemas.openxmlformats.org/drawingml/2006/main" noGrp="1"/>
+            </p:cNvSpPr>
+            <p:nvPr/>
+          </p:nvSpPr>
+          <p:spPr>
+            <a:xfrm xmlns:a="http://schemas.openxmlformats.org/drawingml/2006/main" flipV="1">
+              <a:off x="6170839" y="2181225"/>
+              <a:ext cx="217714" cy="150019"/>
+            </a:xfrm>
+            <a:prstGeom xmlns:a="http://schemas.openxmlformats.org/drawingml/2006/main" prst="line">
+              <a:avLst/>
+            </a:prstGeom>
+            <a:noFill xmlns:a="http://schemas.openxmlformats.org/drawingml/2006/main"/>
+            <a:ln xmlns:a="http://schemas.openxmlformats.org/drawingml/2006/main" w="24765">
+              <a:solidFill>
+                <a:srgbClr val="3D896D"/>
+              </a:solidFill>
+            </a:ln>
+          </p:spPr>
+        </p:sp>
+        <p:sp>
+          <p:nvSpPr>
+            <p:cNvPr id="77" name="synthesis-input">
+              <a:extLst xmlns:a="http://schemas.openxmlformats.org/drawingml/2006/main">
+                <a:ext uri="{FF2B5EF4-FFF2-40B4-BE49-F238E27FC236}">
+                  <a16:creationId xmlns:a16="http://schemas.microsoft.com/office/drawing/2014/main" id="{CE1B71BC-73E1-4201-8E9B-D8577A259CB1}"/>
+                </a:ext>
+              </a:extLst>
+            </p:cNvPr>
+            <p:cNvSpPr>
+              <a:spLocks xmlns:a="http://schemas.openxmlformats.org/drawingml/2006/main" noGrp="1"/>
+            </p:cNvSpPr>
+            <p:nvPr/>
+          </p:nvSpPr>
+          <p:spPr>
+            <a:xfrm xmlns:a="http://schemas.openxmlformats.org/drawingml/2006/main" flipV="0">
+              <a:off x="6388554" y="2181225"/>
+              <a:ext cx="217714" cy="50006"/>
+            </a:xfrm>
+            <a:prstGeom xmlns:a="http://schemas.openxmlformats.org/drawingml/2006/main" prst="line">
+              <a:avLst/>
+            </a:prstGeom>
+            <a:noFill xmlns:a="http://schemas.openxmlformats.org/drawingml/2006/main"/>
+            <a:ln xmlns:a="http://schemas.openxmlformats.org/drawingml/2006/main" w="24765">
+              <a:solidFill>
+                <a:srgbClr val="3D896D"/>
+              </a:solidFill>
+            </a:ln>
+          </p:spPr>
+        </p:sp>
+        <p:sp>
+          <p:nvSpPr>
+            <p:cNvPr id="78" name="synthesis-input">
+              <a:extLst xmlns:a="http://schemas.openxmlformats.org/drawingml/2006/main">
+                <a:ext uri="{FF2B5EF4-FFF2-40B4-BE49-F238E27FC236}">
+                  <a16:creationId xmlns:a16="http://schemas.microsoft.com/office/drawing/2014/main" id="{CE35E525-4C8C-49F6-8721-688DEB94F776}"/>
+                </a:ext>
+              </a:extLst>
+            </p:cNvPr>
+            <p:cNvSpPr>
+              <a:spLocks xmlns:a="http://schemas.openxmlformats.org/drawingml/2006/main" noGrp="1"/>
+            </p:cNvSpPr>
+            <p:nvPr/>
+          </p:nvSpPr>
+          <p:spPr>
+            <a:xfrm xmlns:a="http://schemas.openxmlformats.org/drawingml/2006/main" flipV="0">
+              <a:off x="6606268" y="2231231"/>
+              <a:ext cx="217714" cy="116681"/>
+            </a:xfrm>
+            <a:prstGeom xmlns:a="http://schemas.openxmlformats.org/drawingml/2006/main" prst="line">
+              <a:avLst/>
+            </a:prstGeom>
+            <a:noFill xmlns:a="http://schemas.openxmlformats.org/drawingml/2006/main"/>
+            <a:ln xmlns:a="http://schemas.openxmlformats.org/drawingml/2006/main" w="24765">
+              <a:solidFill>
+                <a:srgbClr val="3D896D"/>
+              </a:solidFill>
+            </a:ln>
+          </p:spPr>
+        </p:sp>
+        <p:sp>
+          <p:nvSpPr>
+            <p:cNvPr id="79" name="synthesis-input">
+              <a:extLst xmlns:a="http://schemas.openxmlformats.org/drawingml/2006/main">
+                <a:ext uri="{FF2B5EF4-FFF2-40B4-BE49-F238E27FC236}">
+                  <a16:creationId xmlns:a16="http://schemas.microsoft.com/office/drawing/2014/main" id="{DD67B9D0-B68D-4A3B-8A10-8BB2C299CD92}"/>
+                </a:ext>
+              </a:extLst>
+            </p:cNvPr>
+            <p:cNvSpPr>
+              <a:spLocks xmlns:a="http://schemas.openxmlformats.org/drawingml/2006/main" noGrp="1"/>
+            </p:cNvSpPr>
+            <p:nvPr/>
+          </p:nvSpPr>
+          <p:spPr>
+            <a:xfrm xmlns:a="http://schemas.openxmlformats.org/drawingml/2006/main" flipV="1">
+              <a:off x="6823982" y="2314575"/>
+              <a:ext cx="217714" cy="33338"/>
+            </a:xfrm>
+            <a:prstGeom xmlns:a="http://schemas.openxmlformats.org/drawingml/2006/main" prst="line">
+              <a:avLst/>
+            </a:prstGeom>
+            <a:noFill xmlns:a="http://schemas.openxmlformats.org/drawingml/2006/main"/>
+            <a:ln xmlns:a="http://schemas.openxmlformats.org/drawingml/2006/main" w="24765">
+              <a:solidFill>
+                <a:srgbClr val="3D896D"/>
+              </a:solidFill>
+            </a:ln>
+          </p:spPr>
+        </p:sp>
+        <p:sp>
+          <p:nvSpPr>
+            <p:cNvPr id="80" name="synthesis-input">
+              <a:extLst xmlns:a="http://schemas.openxmlformats.org/drawingml/2006/main">
+                <a:ext uri="{FF2B5EF4-FFF2-40B4-BE49-F238E27FC236}">
+                  <a16:creationId xmlns:a16="http://schemas.microsoft.com/office/drawing/2014/main" id="{6BDB605C-3831-48A9-9DEA-83C25F4543BD}"/>
+                </a:ext>
+              </a:extLst>
+            </p:cNvPr>
+            <p:cNvSpPr>
+              <a:spLocks xmlns:a="http://schemas.openxmlformats.org/drawingml/2006/main" noGrp="1"/>
+            </p:cNvSpPr>
+            <p:nvPr/>
+          </p:nvSpPr>
+          <p:spPr>
+            <a:xfrm xmlns:a="http://schemas.openxmlformats.org/drawingml/2006/main" flipV="1">
+              <a:off x="7041696" y="2197894"/>
+              <a:ext cx="217714" cy="116681"/>
+            </a:xfrm>
+            <a:prstGeom xmlns:a="http://schemas.openxmlformats.org/drawingml/2006/main" prst="line">
+              <a:avLst/>
+            </a:prstGeom>
+            <a:noFill xmlns:a="http://schemas.openxmlformats.org/drawingml/2006/main"/>
+            <a:ln xmlns:a="http://schemas.openxmlformats.org/drawingml/2006/main" w="24765">
+              <a:solidFill>
+                <a:srgbClr val="3D896D"/>
+              </a:solidFill>
+            </a:ln>
+          </p:spPr>
+        </p:sp>
+        <p:sp>
+          <p:nvSpPr>
+            <p:cNvPr id="81" name="synthesis-input">
+              <a:extLst xmlns:a="http://schemas.openxmlformats.org/drawingml/2006/main">
+                <a:ext uri="{FF2B5EF4-FFF2-40B4-BE49-F238E27FC236}">
+                  <a16:creationId xmlns:a16="http://schemas.microsoft.com/office/drawing/2014/main" id="{C20ED5DD-394D-4F6D-BE1B-F76FD7C4C555}"/>
+                </a:ext>
+              </a:extLst>
+            </p:cNvPr>
+            <p:cNvSpPr>
+              <a:spLocks xmlns:a="http://schemas.openxmlformats.org/drawingml/2006/main" noGrp="1"/>
+            </p:cNvSpPr>
+            <p:nvPr/>
+          </p:nvSpPr>
+          <p:spPr>
+            <a:xfrm xmlns:a="http://schemas.openxmlformats.org/drawingml/2006/main" flipV="0">
+              <a:off x="7259411" y="2197894"/>
+              <a:ext cx="217714" cy="66675"/>
+            </a:xfrm>
+            <a:prstGeom xmlns:a="http://schemas.openxmlformats.org/drawingml/2006/main" prst="line">
+              <a:avLst/>
+            </a:prstGeom>
+            <a:noFill xmlns:a="http://schemas.openxmlformats.org/drawingml/2006/main"/>
+            <a:ln xmlns:a="http://schemas.openxmlformats.org/drawingml/2006/main" w="24765">
+              <a:solidFill>
+                <a:srgbClr val="3D896D"/>
+              </a:solidFill>
+            </a:ln>
+          </p:spPr>
+        </p:sp>
+        <p:sp>
+          <p:nvSpPr>
+            <p:cNvPr id="82" name="synthesis-input">
+              <a:extLst xmlns:a="http://schemas.openxmlformats.org/drawingml/2006/main">
+                <a:ext uri="{FF2B5EF4-FFF2-40B4-BE49-F238E27FC236}">
+                  <a16:creationId xmlns:a16="http://schemas.microsoft.com/office/drawing/2014/main" id="{F7B829A9-D799-4492-B5CE-A779E3E333BF}"/>
+                </a:ext>
+              </a:extLst>
+            </p:cNvPr>
+            <p:cNvSpPr>
+              <a:spLocks xmlns:a="http://schemas.openxmlformats.org/drawingml/2006/main" noGrp="1"/>
+            </p:cNvSpPr>
+            <p:nvPr/>
+          </p:nvSpPr>
+          <p:spPr>
+            <a:xfrm xmlns:a="http://schemas.openxmlformats.org/drawingml/2006/main" flipV="1">
+              <a:off x="5953125" y="2569369"/>
+              <a:ext cx="217714" cy="50006"/>
+            </a:xfrm>
+            <a:prstGeom xmlns:a="http://schemas.openxmlformats.org/drawingml/2006/main" prst="line">
+              <a:avLst/>
+            </a:prstGeom>
+            <a:noFill xmlns:a="http://schemas.openxmlformats.org/drawingml/2006/main"/>
+            <a:ln xmlns:a="http://schemas.openxmlformats.org/drawingml/2006/main" w="24765">
+              <a:solidFill>
+                <a:srgbClr val="3D896D"/>
+              </a:solidFill>
+            </a:ln>
+          </p:spPr>
+        </p:sp>
+        <p:sp>
+          <p:nvSpPr>
+            <p:cNvPr id="83" name="synthesis-input">
+              <a:extLst xmlns:a="http://schemas.openxmlformats.org/drawingml/2006/main">
+                <a:ext uri="{FF2B5EF4-FFF2-40B4-BE49-F238E27FC236}">
+                  <a16:creationId xmlns:a16="http://schemas.microsoft.com/office/drawing/2014/main" id="{56FACFC8-7134-477A-A038-A627B03664BB}"/>
+                </a:ext>
+              </a:extLst>
+            </p:cNvPr>
+            <p:cNvSpPr>
+              <a:spLocks xmlns:a="http://schemas.openxmlformats.org/drawingml/2006/main" noGrp="1"/>
+            </p:cNvSpPr>
+            <p:nvPr/>
+          </p:nvSpPr>
+          <p:spPr>
+            <a:xfrm xmlns:a="http://schemas.openxmlformats.org/drawingml/2006/main" flipV="1">
+              <a:off x="6170839" y="2419350"/>
+              <a:ext cx="217714" cy="150019"/>
+            </a:xfrm>
+            <a:prstGeom xmlns:a="http://schemas.openxmlformats.org/drawingml/2006/main" prst="line">
+              <a:avLst/>
+            </a:prstGeom>
+            <a:noFill xmlns:a="http://schemas.openxmlformats.org/drawingml/2006/main"/>
+            <a:ln xmlns:a="http://schemas.openxmlformats.org/drawingml/2006/main" w="24765">
+              <a:solidFill>
+                <a:srgbClr val="3D896D"/>
+              </a:solidFill>
+            </a:ln>
+          </p:spPr>
+        </p:sp>
+        <p:sp>
+          <p:nvSpPr>
+            <p:cNvPr id="84" name="synthesis-input">
+              <a:extLst xmlns:a="http://schemas.openxmlformats.org/drawingml/2006/main">
+                <a:ext uri="{FF2B5EF4-FFF2-40B4-BE49-F238E27FC236}">
+                  <a16:creationId xmlns:a16="http://schemas.microsoft.com/office/drawing/2014/main" id="{6AD172A3-B015-4CB2-8941-164114079F18}"/>
+                </a:ext>
+              </a:extLst>
+            </p:cNvPr>
+            <p:cNvSpPr>
+              <a:spLocks xmlns:a="http://schemas.openxmlformats.org/drawingml/2006/main" noGrp="1"/>
+            </p:cNvSpPr>
+            <p:nvPr/>
+          </p:nvSpPr>
+          <p:spPr>
+            <a:xfrm xmlns:a="http://schemas.openxmlformats.org/drawingml/2006/main" flipV="0">
+              <a:off x="6388554" y="2419350"/>
+              <a:ext cx="217714" cy="50006"/>
+            </a:xfrm>
+            <a:prstGeom xmlns:a="http://schemas.openxmlformats.org/drawingml/2006/main" prst="line">
+              <a:avLst/>
+            </a:prstGeom>
+            <a:noFill xmlns:a="http://schemas.openxmlformats.org/drawingml/2006/main"/>
+            <a:ln xmlns:a="http://schemas.openxmlformats.org/drawingml/2006/main" w="24765">
+              <a:solidFill>
+                <a:srgbClr val="3D896D"/>
+              </a:solidFill>
+            </a:ln>
+          </p:spPr>
+        </p:sp>
+        <p:sp>
+          <p:nvSpPr>
+            <p:cNvPr id="85" name="synthesis-input">
+              <a:extLst xmlns:a="http://schemas.openxmlformats.org/drawingml/2006/main">
+                <a:ext uri="{FF2B5EF4-FFF2-40B4-BE49-F238E27FC236}">
+                  <a16:creationId xmlns:a16="http://schemas.microsoft.com/office/drawing/2014/main" id="{E51F2109-ECAE-423E-9882-86DB7261E502}"/>
+                </a:ext>
+              </a:extLst>
+            </p:cNvPr>
+            <p:cNvSpPr>
+              <a:spLocks xmlns:a="http://schemas.openxmlformats.org/drawingml/2006/main" noGrp="1"/>
+            </p:cNvSpPr>
+            <p:nvPr/>
+          </p:nvSpPr>
+          <p:spPr>
+            <a:xfrm xmlns:a="http://schemas.openxmlformats.org/drawingml/2006/main" flipV="0">
+              <a:off x="6606268" y="2469356"/>
+              <a:ext cx="217714" cy="116681"/>
+            </a:xfrm>
+            <a:prstGeom xmlns:a="http://schemas.openxmlformats.org/drawingml/2006/main" prst="line">
+              <a:avLst/>
+            </a:prstGeom>
+            <a:noFill xmlns:a="http://schemas.openxmlformats.org/drawingml/2006/main"/>
+            <a:ln xmlns:a="http://schemas.openxmlformats.org/drawingml/2006/main" w="24765">
+              <a:solidFill>
+                <a:srgbClr val="3D896D"/>
+              </a:solidFill>
+            </a:ln>
+          </p:spPr>
+        </p:sp>
+        <p:sp>
+          <p:nvSpPr>
+            <p:cNvPr id="86" name="synthesis-input">
+              <a:extLst xmlns:a="http://schemas.openxmlformats.org/drawingml/2006/main">
+                <a:ext uri="{FF2B5EF4-FFF2-40B4-BE49-F238E27FC236}">
+                  <a16:creationId xmlns:a16="http://schemas.microsoft.com/office/drawing/2014/main" id="{7861BE26-E59F-4801-9EE0-631D29FCB52F}"/>
+                </a:ext>
+              </a:extLst>
+            </p:cNvPr>
+            <p:cNvSpPr>
+              <a:spLocks xmlns:a="http://schemas.openxmlformats.org/drawingml/2006/main" noGrp="1"/>
+            </p:cNvSpPr>
+            <p:nvPr/>
+          </p:nvSpPr>
+          <p:spPr>
+            <a:xfrm xmlns:a="http://schemas.openxmlformats.org/drawingml/2006/main" flipV="1">
+              <a:off x="6823982" y="2552700"/>
+              <a:ext cx="217714" cy="33338"/>
+            </a:xfrm>
+            <a:prstGeom xmlns:a="http://schemas.openxmlformats.org/drawingml/2006/main" prst="line">
+              <a:avLst/>
+            </a:prstGeom>
+            <a:noFill xmlns:a="http://schemas.openxmlformats.org/drawingml/2006/main"/>
+            <a:ln xmlns:a="http://schemas.openxmlformats.org/drawingml/2006/main" w="24765">
+              <a:solidFill>
+                <a:srgbClr val="3D896D"/>
+              </a:solidFill>
+            </a:ln>
+          </p:spPr>
+        </p:sp>
+        <p:sp>
+          <p:nvSpPr>
+            <p:cNvPr id="87" name="synthesis-input">
+              <a:extLst xmlns:a="http://schemas.openxmlformats.org/drawingml/2006/main">
+                <a:ext uri="{FF2B5EF4-FFF2-40B4-BE49-F238E27FC236}">
+                  <a16:creationId xmlns:a16="http://schemas.microsoft.com/office/drawing/2014/main" id="{F6B7251B-21EE-4264-8EB6-DA6E1A279424}"/>
+                </a:ext>
+              </a:extLst>
+            </p:cNvPr>
+            <p:cNvSpPr>
+              <a:spLocks xmlns:a="http://schemas.openxmlformats.org/drawingml/2006/main" noGrp="1"/>
+            </p:cNvSpPr>
+            <p:nvPr/>
+          </p:nvSpPr>
+          <p:spPr>
+            <a:xfrm xmlns:a="http://schemas.openxmlformats.org/drawingml/2006/main" flipV="1">
+              <a:off x="7041696" y="2436019"/>
+              <a:ext cx="217714" cy="116681"/>
+            </a:xfrm>
+            <a:prstGeom xmlns:a="http://schemas.openxmlformats.org/drawingml/2006/main" prst="line">
+              <a:avLst/>
+            </a:prstGeom>
+            <a:noFill xmlns:a="http://schemas.openxmlformats.org/drawingml/2006/main"/>
+            <a:ln xmlns:a="http://schemas.openxmlformats.org/drawingml/2006/main" w="24765">
+              <a:solidFill>
+                <a:srgbClr val="3D896D"/>
+              </a:solidFill>
+            </a:ln>
+          </p:spPr>
+        </p:sp>
+        <p:sp>
+          <p:nvSpPr>
+            <p:cNvPr id="88" name="synthesis-input">
+              <a:extLst xmlns:a="http://schemas.openxmlformats.org/drawingml/2006/main">
+                <a:ext uri="{FF2B5EF4-FFF2-40B4-BE49-F238E27FC236}">
+                  <a16:creationId xmlns:a16="http://schemas.microsoft.com/office/drawing/2014/main" id="{8D9E4B2C-2031-4C80-86C5-6C93F5DBF1E8}"/>
+                </a:ext>
+              </a:extLst>
+            </p:cNvPr>
+            <p:cNvSpPr>
+              <a:spLocks xmlns:a="http://schemas.openxmlformats.org/drawingml/2006/main" noGrp="1"/>
+            </p:cNvSpPr>
+            <p:nvPr/>
+          </p:nvSpPr>
+          <p:spPr>
+            <a:xfrm xmlns:a="http://schemas.openxmlformats.org/drawingml/2006/main" flipV="0">
+              <a:off x="7259411" y="2436019"/>
+              <a:ext cx="217714" cy="66675"/>
+            </a:xfrm>
+            <a:prstGeom xmlns:a="http://schemas.openxmlformats.org/drawingml/2006/main" prst="line">
+              <a:avLst/>
+            </a:prstGeom>
+            <a:noFill xmlns:a="http://schemas.openxmlformats.org/drawingml/2006/main"/>
+            <a:ln xmlns:a="http://schemas.openxmlformats.org/drawingml/2006/main" w="24765">
+              <a:solidFill>
+                <a:srgbClr val="3D896D"/>
+              </a:solidFill>
+            </a:ln>
+          </p:spPr>
+        </p:sp>
+        <p:sp>
+          <p:nvSpPr>
+            <p:cNvPr id="89" name="synthesis-input">
+              <a:extLst xmlns:a="http://schemas.openxmlformats.org/drawingml/2006/main">
+                <a:ext uri="{FF2B5EF4-FFF2-40B4-BE49-F238E27FC236}">
+                  <a16:creationId xmlns:a16="http://schemas.microsoft.com/office/drawing/2014/main" id="{56C6E68A-C130-4BDE-9735-EE33F1C1DB32}"/>
+                </a:ext>
+              </a:extLst>
+            </p:cNvPr>
+            <p:cNvSpPr>
+              <a:spLocks xmlns:a="http://schemas.openxmlformats.org/drawingml/2006/main" noGrp="1"/>
+            </p:cNvSpPr>
+            <p:nvPr/>
+          </p:nvSpPr>
+          <p:spPr>
+            <a:xfrm xmlns:a="http://schemas.openxmlformats.org/drawingml/2006/main" flipV="1">
+              <a:off x="5953125" y="2807494"/>
+              <a:ext cx="217714" cy="50006"/>
+            </a:xfrm>
+            <a:prstGeom xmlns:a="http://schemas.openxmlformats.org/drawingml/2006/main" prst="line">
+              <a:avLst/>
+            </a:prstGeom>
+            <a:noFill xmlns:a="http://schemas.openxmlformats.org/drawingml/2006/main"/>
+            <a:ln xmlns:a="http://schemas.openxmlformats.org/drawingml/2006/main" w="24765">
+              <a:solidFill>
+                <a:srgbClr val="3D896D"/>
+              </a:solidFill>
+            </a:ln>
+          </p:spPr>
+        </p:sp>
+        <p:sp>
+          <p:nvSpPr>
+            <p:cNvPr id="90" name="synthesis-input">
+              <a:extLst xmlns:a="http://schemas.openxmlformats.org/drawingml/2006/main">
+                <a:ext uri="{FF2B5EF4-FFF2-40B4-BE49-F238E27FC236}">
+                  <a16:creationId xmlns:a16="http://schemas.microsoft.com/office/drawing/2014/main" id="{7E9C3792-C4D8-4DA6-B57B-7BF621556B91}"/>
+                </a:ext>
+              </a:extLst>
+            </p:cNvPr>
+            <p:cNvSpPr>
+              <a:spLocks xmlns:a="http://schemas.openxmlformats.org/drawingml/2006/main" noGrp="1"/>
+            </p:cNvSpPr>
+            <p:nvPr/>
+          </p:nvSpPr>
+          <p:spPr>
+            <a:xfrm xmlns:a="http://schemas.openxmlformats.org/drawingml/2006/main" flipV="1">
+              <a:off x="6170839" y="2657475"/>
+              <a:ext cx="217714" cy="150019"/>
+            </a:xfrm>
+            <a:prstGeom xmlns:a="http://schemas.openxmlformats.org/drawingml/2006/main" prst="line">
+              <a:avLst/>
+            </a:prstGeom>
+            <a:noFill xmlns:a="http://schemas.openxmlformats.org/drawingml/2006/main"/>
+            <a:ln xmlns:a="http://schemas.openxmlformats.org/drawingml/2006/main" w="24765">
+              <a:solidFill>
+                <a:srgbClr val="3D896D"/>
+              </a:solidFill>
+            </a:ln>
+          </p:spPr>
+        </p:sp>
+        <p:sp>
+          <p:nvSpPr>
+            <p:cNvPr id="91" name="synthesis-input">
+              <a:extLst xmlns:a="http://schemas.openxmlformats.org/drawingml/2006/main">
+                <a:ext uri="{FF2B5EF4-FFF2-40B4-BE49-F238E27FC236}">
+                  <a16:creationId xmlns:a16="http://schemas.microsoft.com/office/drawing/2014/main" id="{8C2ACB5A-4DCC-4DD9-B51E-BFF50A196C9E}"/>
+                </a:ext>
+              </a:extLst>
+            </p:cNvPr>
+            <p:cNvSpPr>
+              <a:spLocks xmlns:a="http://schemas.openxmlformats.org/drawingml/2006/main" noGrp="1"/>
+            </p:cNvSpPr>
+            <p:nvPr/>
+          </p:nvSpPr>
+          <p:spPr>
+            <a:xfrm xmlns:a="http://schemas.openxmlformats.org/drawingml/2006/main" flipV="0">
+              <a:off x="6388554" y="2657475"/>
+              <a:ext cx="217714" cy="50006"/>
+            </a:xfrm>
+            <a:prstGeom xmlns:a="http://schemas.openxmlformats.org/drawingml/2006/main" prst="line">
+              <a:avLst/>
+            </a:prstGeom>
+            <a:noFill xmlns:a="http://schemas.openxmlformats.org/drawingml/2006/main"/>
+            <a:ln xmlns:a="http://schemas.openxmlformats.org/drawingml/2006/main" w="24765">
+              <a:solidFill>
+                <a:srgbClr val="3D896D"/>
+              </a:solidFill>
+            </a:ln>
+          </p:spPr>
+        </p:sp>
+        <p:sp>
+          <p:nvSpPr>
+            <p:cNvPr id="92" name="synthesis-input">
+              <a:extLst xmlns:a="http://schemas.openxmlformats.org/drawingml/2006/main">
+                <a:ext uri="{FF2B5EF4-FFF2-40B4-BE49-F238E27FC236}">
+                  <a16:creationId xmlns:a16="http://schemas.microsoft.com/office/drawing/2014/main" id="{D3AEE8F0-0A18-482D-A646-7E5D7FC3469E}"/>
+                </a:ext>
+              </a:extLst>
+            </p:cNvPr>
+            <p:cNvSpPr>
+              <a:spLocks xmlns:a="http://schemas.openxmlformats.org/drawingml/2006/main" noGrp="1"/>
+            </p:cNvSpPr>
+            <p:nvPr/>
+          </p:nvSpPr>
+          <p:spPr>
+            <a:xfrm xmlns:a="http://schemas.openxmlformats.org/drawingml/2006/main" flipV="0">
+              <a:off x="6606268" y="2707481"/>
+              <a:ext cx="217714" cy="116681"/>
+            </a:xfrm>
+            <a:prstGeom xmlns:a="http://schemas.openxmlformats.org/drawingml/2006/main" prst="line">
+              <a:avLst/>
+            </a:prstGeom>
+            <a:noFill xmlns:a="http://schemas.openxmlformats.org/drawingml/2006/main"/>
+            <a:ln xmlns:a="http://schemas.openxmlformats.org/drawingml/2006/main" w="24765">
+              <a:solidFill>
+                <a:srgbClr val="3D896D"/>
+              </a:solidFill>
+            </a:ln>
+          </p:spPr>
+        </p:sp>
+        <p:sp>
+          <p:nvSpPr>
+            <p:cNvPr id="93" name="synthesis-input">
+              <a:extLst xmlns:a="http://schemas.openxmlformats.org/drawingml/2006/main">
+                <a:ext uri="{FF2B5EF4-FFF2-40B4-BE49-F238E27FC236}">
+                  <a16:creationId xmlns:a16="http://schemas.microsoft.com/office/drawing/2014/main" id="{C4F1616D-1592-4F94-A93C-929CFD22B9BF}"/>
+                </a:ext>
+              </a:extLst>
+            </p:cNvPr>
+            <p:cNvSpPr>
+              <a:spLocks xmlns:a="http://schemas.openxmlformats.org/drawingml/2006/main" noGrp="1"/>
+            </p:cNvSpPr>
+            <p:nvPr/>
+          </p:nvSpPr>
+          <p:spPr>
+            <a:xfrm xmlns:a="http://schemas.openxmlformats.org/drawingml/2006/main" flipV="1">
+              <a:off x="6823982" y="2790825"/>
+              <a:ext cx="217714" cy="33338"/>
+            </a:xfrm>
+            <a:prstGeom xmlns:a="http://schemas.openxmlformats.org/drawingml/2006/main" prst="line">
+              <a:avLst/>
+            </a:prstGeom>
+            <a:noFill xmlns:a="http://schemas.openxmlformats.org/drawingml/2006/main"/>
+            <a:ln xmlns:a="http://schemas.openxmlformats.org/drawingml/2006/main" w="24765">
+              <a:solidFill>
+                <a:srgbClr val="3D896D"/>
+              </a:solidFill>
+            </a:ln>
+          </p:spPr>
+        </p:sp>
+        <p:sp>
+          <p:nvSpPr>
+            <p:cNvPr id="94" name="synthesis-input">
+              <a:extLst xmlns:a="http://schemas.openxmlformats.org/drawingml/2006/main">
+                <a:ext uri="{FF2B5EF4-FFF2-40B4-BE49-F238E27FC236}">
+                  <a16:creationId xmlns:a16="http://schemas.microsoft.com/office/drawing/2014/main" id="{AB4D628D-77E9-45C8-9219-D475BA9AC41E}"/>
+                </a:ext>
+              </a:extLst>
+            </p:cNvPr>
+            <p:cNvSpPr>
+              <a:spLocks xmlns:a="http://schemas.openxmlformats.org/drawingml/2006/main" noGrp="1"/>
+            </p:cNvSpPr>
+            <p:nvPr/>
+          </p:nvSpPr>
+          <p:spPr>
+            <a:xfrm xmlns:a="http://schemas.openxmlformats.org/drawingml/2006/main" flipV="1">
+              <a:off x="7041696" y="2674144"/>
+              <a:ext cx="217714" cy="116681"/>
+            </a:xfrm>
+            <a:prstGeom xmlns:a="http://schemas.openxmlformats.org/drawingml/2006/main" prst="line">
+              <a:avLst/>
+            </a:prstGeom>
+            <a:noFill xmlns:a="http://schemas.openxmlformats.org/drawingml/2006/main"/>
+            <a:ln xmlns:a="http://schemas.openxmlformats.org/drawingml/2006/main" w="24765">
+              <a:solidFill>
+                <a:srgbClr val="3D896D"/>
+              </a:solidFill>
+            </a:ln>
+          </p:spPr>
+        </p:sp>
+        <p:sp>
+          <p:nvSpPr>
+            <p:cNvPr id="95" name="synthesis-input">
+              <a:extLst xmlns:a="http://schemas.openxmlformats.org/drawingml/2006/main">
+                <a:ext uri="{FF2B5EF4-FFF2-40B4-BE49-F238E27FC236}">
+                  <a16:creationId xmlns:a16="http://schemas.microsoft.com/office/drawing/2014/main" id="{EB59B12E-2709-48CE-AA89-8338F298A4C9}"/>
+                </a:ext>
+              </a:extLst>
+            </p:cNvPr>
+            <p:cNvSpPr>
+              <a:spLocks xmlns:a="http://schemas.openxmlformats.org/drawingml/2006/main" noGrp="1"/>
+            </p:cNvSpPr>
+            <p:nvPr/>
+          </p:nvSpPr>
+          <p:spPr>
+            <a:xfrm xmlns:a="http://schemas.openxmlformats.org/drawingml/2006/main" flipV="0">
+              <a:off x="7259411" y="2674144"/>
+              <a:ext cx="217714" cy="66675"/>
+            </a:xfrm>
+            <a:prstGeom xmlns:a="http://schemas.openxmlformats.org/drawingml/2006/main" prst="line">
+              <a:avLst/>
+            </a:prstGeom>
+            <a:noFill xmlns:a="http://schemas.openxmlformats.org/drawingml/2006/main"/>
+            <a:ln xmlns:a="http://schemas.openxmlformats.org/drawingml/2006/main" w="24765">
+              <a:solidFill>
+                <a:srgbClr val="3D896D"/>
+              </a:solidFill>
+            </a:ln>
+          </p:spPr>
+        </p:sp>
+        <p:sp>
+          <p:nvSpPr>
+            <p:cNvPr id="96" name="anomaly-input">
+              <a:extLst xmlns:a="http://schemas.openxmlformats.org/drawingml/2006/main">
+                <a:ext uri="{FF2B5EF4-FFF2-40B4-BE49-F238E27FC236}">
+                  <a16:creationId xmlns:a16="http://schemas.microsoft.com/office/drawing/2014/main" id="{314E43CB-E92D-4FF7-B23F-D49EB01A90B1}"/>
+                </a:ext>
+              </a:extLst>
+            </p:cNvPr>
+            <p:cNvSpPr>
+              <a:spLocks xmlns:a="http://schemas.openxmlformats.org/drawingml/2006/main" noGrp="1"/>
+            </p:cNvSpPr>
+            <p:nvPr/>
+          </p:nvSpPr>
+          <p:spPr>
+            <a:xfrm xmlns:a="http://schemas.openxmlformats.org/drawingml/2006/main">
+              <a:off x="9715500" y="2095500"/>
+              <a:ext cx="361950" cy="876300"/>
+            </a:xfrm>
+            <a:prstGeom xmlns:a="http://schemas.openxmlformats.org/drawingml/2006/main" prst="rect">
+              <a:avLst/>
+            </a:prstGeom>
+            <a:solidFill xmlns:a="http://schemas.openxmlformats.org/drawingml/2006/main">
+              <a:srgbClr val="EFBFBD"/>
+            </a:solidFill>
+            <a:ln xmlns:a="http://schemas.openxmlformats.org/drawingml/2006/main" w="19050">
+              <a:noFill/>
+            </a:ln>
+          </p:spPr>
+        </p:sp>
+        <p:sp>
+          <p:nvSpPr>
+            <p:cNvPr id="97" name="anomaly-input">
+              <a:extLst xmlns:a="http://schemas.openxmlformats.org/drawingml/2006/main">
+                <a:ext uri="{FF2B5EF4-FFF2-40B4-BE49-F238E27FC236}">
+                  <a16:creationId xmlns:a16="http://schemas.microsoft.com/office/drawing/2014/main" id="{A4125F42-B0CE-4F2B-AE23-37110F8A6A99}"/>
+                </a:ext>
+              </a:extLst>
+            </p:cNvPr>
+            <p:cNvSpPr>
+              <a:spLocks xmlns:a="http://schemas.openxmlformats.org/drawingml/2006/main" noGrp="1"/>
+            </p:cNvSpPr>
+            <p:nvPr/>
+          </p:nvSpPr>
+          <p:spPr>
+            <a:xfrm xmlns:a="http://schemas.openxmlformats.org/drawingml/2006/main" flipV="0">
+              <a:off x="9048750" y="2143125"/>
+              <a:ext cx="95" cy="762000"/>
+            </a:xfrm>
+            <a:prstGeom xmlns:a="http://schemas.openxmlformats.org/drawingml/2006/main" prst="line">
+              <a:avLst/>
+            </a:prstGeom>
+            <a:noFill xmlns:a="http://schemas.openxmlformats.org/drawingml/2006/main"/>
+            <a:ln xmlns:a="http://schemas.openxmlformats.org/drawingml/2006/main" w="9525">
+              <a:solidFill>
+                <a:srgbClr val="747B80"/>
+              </a:solidFill>
+            </a:ln>
+          </p:spPr>
+        </p:sp>
+        <p:sp>
+          <p:nvSpPr>
+            <p:cNvPr id="98" name="anomaly-input">
+              <a:extLst xmlns:a="http://schemas.openxmlformats.org/drawingml/2006/main">
+                <a:ext uri="{FF2B5EF4-FFF2-40B4-BE49-F238E27FC236}">
+                  <a16:creationId xmlns:a16="http://schemas.microsoft.com/office/drawing/2014/main" id="{AFB5DB4B-6820-48AA-B37C-5D8DAD8436B2}"/>
+                </a:ext>
+              </a:extLst>
+            </p:cNvPr>
+            <p:cNvSpPr>
+              <a:spLocks xmlns:a="http://schemas.openxmlformats.org/drawingml/2006/main" noGrp="1"/>
+            </p:cNvSpPr>
+            <p:nvPr/>
+          </p:nvSpPr>
+          <p:spPr>
+            <a:xfrm xmlns:a="http://schemas.openxmlformats.org/drawingml/2006/main" flipV="0">
+              <a:off x="9048750" y="2905125"/>
+              <a:ext cx="1762125" cy="95"/>
+            </a:xfrm>
+            <a:prstGeom xmlns:a="http://schemas.openxmlformats.org/drawingml/2006/main" prst="line">
+              <a:avLst/>
+            </a:prstGeom>
+            <a:noFill xmlns:a="http://schemas.openxmlformats.org/drawingml/2006/main"/>
+            <a:ln xmlns:a="http://schemas.openxmlformats.org/drawingml/2006/main" w="9525">
+              <a:solidFill>
+                <a:srgbClr val="747B80"/>
+              </a:solidFill>
+            </a:ln>
+          </p:spPr>
+        </p:sp>
+        <p:sp>
+          <p:nvSpPr>
+            <p:cNvPr id="99" name="anomaly-input">
+              <a:extLst xmlns:a="http://schemas.openxmlformats.org/drawingml/2006/main">
+                <a:ext uri="{FF2B5EF4-FFF2-40B4-BE49-F238E27FC236}">
+                  <a16:creationId xmlns:a16="http://schemas.microsoft.com/office/drawing/2014/main" id="{2386E5B2-4400-4F1A-91EE-A8D0DE56A593}"/>
+                </a:ext>
+              </a:extLst>
+            </p:cNvPr>
+            <p:cNvSpPr>
+              <a:spLocks xmlns:a="http://schemas.openxmlformats.org/drawingml/2006/main" noGrp="1"/>
+            </p:cNvSpPr>
+            <p:nvPr/>
+          </p:nvSpPr>
+          <p:spPr>
+            <a:xfrm xmlns:a="http://schemas.openxmlformats.org/drawingml/2006/main" flipV="1">
+              <a:off x="9048750" y="2638425"/>
+              <a:ext cx="220266" cy="38100"/>
+            </a:xfrm>
+            <a:prstGeom xmlns:a="http://schemas.openxmlformats.org/drawingml/2006/main" prst="line">
+              <a:avLst/>
+            </a:prstGeom>
+            <a:noFill xmlns:a="http://schemas.openxmlformats.org/drawingml/2006/main"/>
+            <a:ln xmlns:a="http://schemas.openxmlformats.org/drawingml/2006/main" w="24765">
+              <a:solidFill>
+                <a:srgbClr val="356F84"/>
+              </a:solidFill>
+            </a:ln>
+          </p:spPr>
+        </p:sp>
+        <p:sp>
+          <p:nvSpPr>
+            <p:cNvPr id="100" name="anomaly-input">
+              <a:extLst xmlns:a="http://schemas.openxmlformats.org/drawingml/2006/main">
+                <a:ext uri="{FF2B5EF4-FFF2-40B4-BE49-F238E27FC236}">
+                  <a16:creationId xmlns:a16="http://schemas.microsoft.com/office/drawing/2014/main" id="{0EDA2729-1E4F-4547-9B21-CF36469DE89A}"/>
+                </a:ext>
+              </a:extLst>
+            </p:cNvPr>
+            <p:cNvSpPr>
+              <a:spLocks xmlns:a="http://schemas.openxmlformats.org/drawingml/2006/main" noGrp="1"/>
+            </p:cNvSpPr>
+            <p:nvPr/>
+          </p:nvSpPr>
+          <p:spPr>
+            <a:xfrm xmlns:a="http://schemas.openxmlformats.org/drawingml/2006/main" flipV="0">
+              <a:off x="9269016" y="2638425"/>
+              <a:ext cx="220266" cy="22860"/>
+            </a:xfrm>
+            <a:prstGeom xmlns:a="http://schemas.openxmlformats.org/drawingml/2006/main" prst="line">
+              <a:avLst/>
+            </a:prstGeom>
+            <a:noFill xmlns:a="http://schemas.openxmlformats.org/drawingml/2006/main"/>
+            <a:ln xmlns:a="http://schemas.openxmlformats.org/drawingml/2006/main" w="24765">
+              <a:solidFill>
+                <a:srgbClr val="356F84"/>
+              </a:solidFill>
+            </a:ln>
+          </p:spPr>
+        </p:sp>
+        <p:sp>
+          <p:nvSpPr>
+            <p:cNvPr id="101" name="anomaly-input">
+              <a:extLst xmlns:a="http://schemas.openxmlformats.org/drawingml/2006/main">
+                <a:ext uri="{FF2B5EF4-FFF2-40B4-BE49-F238E27FC236}">
+                  <a16:creationId xmlns:a16="http://schemas.microsoft.com/office/drawing/2014/main" id="{ABB2C6AD-F98B-4EC8-93E0-7504B27FC202}"/>
+                </a:ext>
+              </a:extLst>
+            </p:cNvPr>
+            <p:cNvSpPr>
+              <a:spLocks xmlns:a="http://schemas.openxmlformats.org/drawingml/2006/main" noGrp="1"/>
+            </p:cNvSpPr>
+            <p:nvPr/>
+          </p:nvSpPr>
+          <p:spPr>
+            <a:xfrm xmlns:a="http://schemas.openxmlformats.org/drawingml/2006/main" flipV="1">
+              <a:off x="9489281" y="2630805"/>
+              <a:ext cx="220266" cy="30480"/>
+            </a:xfrm>
+            <a:prstGeom xmlns:a="http://schemas.openxmlformats.org/drawingml/2006/main" prst="line">
+              <a:avLst/>
+            </a:prstGeom>
+            <a:noFill xmlns:a="http://schemas.openxmlformats.org/drawingml/2006/main"/>
+            <a:ln xmlns:a="http://schemas.openxmlformats.org/drawingml/2006/main" w="24765">
+              <a:solidFill>
+                <a:srgbClr val="356F84"/>
+              </a:solidFill>
+            </a:ln>
+          </p:spPr>
+        </p:sp>
+        <p:sp>
+          <p:nvSpPr>
+            <p:cNvPr id="102" name="anomaly-input">
+              <a:extLst xmlns:a="http://schemas.openxmlformats.org/drawingml/2006/main">
+                <a:ext uri="{FF2B5EF4-FFF2-40B4-BE49-F238E27FC236}">
+                  <a16:creationId xmlns:a16="http://schemas.microsoft.com/office/drawing/2014/main" id="{CC2B877C-1FE7-487F-A309-2B7F0D8D8405}"/>
+                </a:ext>
+              </a:extLst>
+            </p:cNvPr>
+            <p:cNvSpPr>
+              <a:spLocks xmlns:a="http://schemas.openxmlformats.org/drawingml/2006/main" noGrp="1"/>
+            </p:cNvSpPr>
+            <p:nvPr/>
+          </p:nvSpPr>
+          <p:spPr>
+            <a:xfrm xmlns:a="http://schemas.openxmlformats.org/drawingml/2006/main" flipV="1">
+              <a:off x="9709547" y="2196465"/>
+              <a:ext cx="220266" cy="434340"/>
+            </a:xfrm>
+            <a:prstGeom xmlns:a="http://schemas.openxmlformats.org/drawingml/2006/main" prst="line">
+              <a:avLst/>
+            </a:prstGeom>
+            <a:noFill xmlns:a="http://schemas.openxmlformats.org/drawingml/2006/main"/>
+            <a:ln xmlns:a="http://schemas.openxmlformats.org/drawingml/2006/main" w="24765">
+              <a:solidFill>
+                <a:srgbClr val="356F84"/>
+              </a:solidFill>
+            </a:ln>
+          </p:spPr>
+        </p:sp>
+        <p:sp>
+          <p:nvSpPr>
+            <p:cNvPr id="103" name="anomaly-input">
+              <a:extLst xmlns:a="http://schemas.openxmlformats.org/drawingml/2006/main">
+                <a:ext uri="{FF2B5EF4-FFF2-40B4-BE49-F238E27FC236}">
+                  <a16:creationId xmlns:a16="http://schemas.microsoft.com/office/drawing/2014/main" id="{957975A7-94BD-4ED1-969D-00DD599DD2C7}"/>
+                </a:ext>
+              </a:extLst>
+            </p:cNvPr>
+            <p:cNvSpPr>
+              <a:spLocks xmlns:a="http://schemas.openxmlformats.org/drawingml/2006/main" noGrp="1"/>
+            </p:cNvSpPr>
+            <p:nvPr/>
+          </p:nvSpPr>
+          <p:spPr>
+            <a:xfrm xmlns:a="http://schemas.openxmlformats.org/drawingml/2006/main" flipV="0">
+              <a:off x="9929813" y="2196465"/>
+              <a:ext cx="220266" cy="472440"/>
+            </a:xfrm>
+            <a:prstGeom xmlns:a="http://schemas.openxmlformats.org/drawingml/2006/main" prst="line">
+              <a:avLst/>
+            </a:prstGeom>
+            <a:noFill xmlns:a="http://schemas.openxmlformats.org/drawingml/2006/main"/>
+            <a:ln xmlns:a="http://schemas.openxmlformats.org/drawingml/2006/main" w="24765">
+              <a:solidFill>
+                <a:srgbClr val="356F84"/>
+              </a:solidFill>
+            </a:ln>
+          </p:spPr>
+        </p:sp>
+        <p:sp>
+          <p:nvSpPr>
+            <p:cNvPr id="104" name="anomaly-input">
+              <a:extLst xmlns:a="http://schemas.openxmlformats.org/drawingml/2006/main">
+                <a:ext uri="{FF2B5EF4-FFF2-40B4-BE49-F238E27FC236}">
+                  <a16:creationId xmlns:a16="http://schemas.microsoft.com/office/drawing/2014/main" id="{1C4C75BC-3F00-4E44-8CE0-E9C2DAB288F8}"/>
+                </a:ext>
+              </a:extLst>
+            </p:cNvPr>
+            <p:cNvSpPr>
+              <a:spLocks xmlns:a="http://schemas.openxmlformats.org/drawingml/2006/main" noGrp="1"/>
+            </p:cNvSpPr>
+            <p:nvPr/>
+          </p:nvSpPr>
+          <p:spPr>
+            <a:xfrm xmlns:a="http://schemas.openxmlformats.org/drawingml/2006/main" flipV="0">
+              <a:off x="10150078" y="2668905"/>
+              <a:ext cx="220266" cy="22860"/>
+            </a:xfrm>
+            <a:prstGeom xmlns:a="http://schemas.openxmlformats.org/drawingml/2006/main" prst="line">
+              <a:avLst/>
+            </a:prstGeom>
+            <a:noFill xmlns:a="http://schemas.openxmlformats.org/drawingml/2006/main"/>
+            <a:ln xmlns:a="http://schemas.openxmlformats.org/drawingml/2006/main" w="24765">
+              <a:solidFill>
+                <a:srgbClr val="356F84"/>
+              </a:solidFill>
+            </a:ln>
+          </p:spPr>
+        </p:sp>
+        <p:sp>
+          <p:nvSpPr>
+            <p:cNvPr id="105" name="anomaly-input">
+              <a:extLst xmlns:a="http://schemas.openxmlformats.org/drawingml/2006/main">
+                <a:ext uri="{FF2B5EF4-FFF2-40B4-BE49-F238E27FC236}">
+                  <a16:creationId xmlns:a16="http://schemas.microsoft.com/office/drawing/2014/main" id="{16F25ACA-821E-43BA-A6A8-1AD65C01BB47}"/>
+                </a:ext>
+              </a:extLst>
+            </p:cNvPr>
+            <p:cNvSpPr>
+              <a:spLocks xmlns:a="http://schemas.openxmlformats.org/drawingml/2006/main" noGrp="1"/>
+            </p:cNvSpPr>
+            <p:nvPr/>
+          </p:nvSpPr>
+          <p:spPr>
+            <a:xfrm xmlns:a="http://schemas.openxmlformats.org/drawingml/2006/main" flipV="1">
+              <a:off x="10370344" y="2646045"/>
+              <a:ext cx="220266" cy="45720"/>
+            </a:xfrm>
+            <a:prstGeom xmlns:a="http://schemas.openxmlformats.org/drawingml/2006/main" prst="line">
+              <a:avLst/>
+            </a:prstGeom>
+            <a:noFill xmlns:a="http://schemas.openxmlformats.org/drawingml/2006/main"/>
+            <a:ln xmlns:a="http://schemas.openxmlformats.org/drawingml/2006/main" w="24765">
+              <a:solidFill>
+                <a:srgbClr val="356F84"/>
+              </a:solidFill>
+            </a:ln>
+          </p:spPr>
+        </p:sp>
+        <p:sp>
+          <p:nvSpPr>
+            <p:cNvPr id="106" name="anomaly-input">
+              <a:extLst xmlns:a="http://schemas.openxmlformats.org/drawingml/2006/main">
+                <a:ext uri="{FF2B5EF4-FFF2-40B4-BE49-F238E27FC236}">
+                  <a16:creationId xmlns:a16="http://schemas.microsoft.com/office/drawing/2014/main" id="{43E2414E-B16D-4188-8AFD-37F12548BD3D}"/>
+                </a:ext>
+              </a:extLst>
+            </p:cNvPr>
+            <p:cNvSpPr>
+              <a:spLocks xmlns:a="http://schemas.openxmlformats.org/drawingml/2006/main" noGrp="1"/>
+            </p:cNvSpPr>
+            <p:nvPr/>
+          </p:nvSpPr>
+          <p:spPr>
+            <a:xfrm xmlns:a="http://schemas.openxmlformats.org/drawingml/2006/main" flipV="0">
+              <a:off x="10590609" y="2646045"/>
+              <a:ext cx="220266" cy="30480"/>
+            </a:xfrm>
+            <a:prstGeom xmlns:a="http://schemas.openxmlformats.org/drawingml/2006/main" prst="line">
+              <a:avLst/>
+            </a:prstGeom>
+            <a:noFill xmlns:a="http://schemas.openxmlformats.org/drawingml/2006/main"/>
+            <a:ln xmlns:a="http://schemas.openxmlformats.org/drawingml/2006/main" w="24765">
+              <a:solidFill>
+                <a:srgbClr val="356F84"/>
+              </a:solidFill>
+            </a:ln>
+          </p:spPr>
+        </p:sp>
+        <p:sp>
+          <p:nvSpPr>
+            <p:cNvPr id="107" name="decision-input">
+              <a:extLst xmlns:a="http://schemas.openxmlformats.org/drawingml/2006/main">
+                <a:ext uri="{FF2B5EF4-FFF2-40B4-BE49-F238E27FC236}">
+                  <a16:creationId xmlns:a16="http://schemas.microsoft.com/office/drawing/2014/main" id="{C42D30E3-5550-4C95-ACA9-115C023A8C94}"/>
+                </a:ext>
+              </a:extLst>
+            </p:cNvPr>
+            <p:cNvSpPr>
+              <a:spLocks xmlns:a="http://schemas.openxmlformats.org/drawingml/2006/main" noGrp="1"/>
+            </p:cNvSpPr>
+            <p:nvPr/>
+          </p:nvSpPr>
+          <p:spPr>
+            <a:xfrm xmlns:a="http://schemas.openxmlformats.org/drawingml/2006/main">
+              <a:off x="12192000" y="2143125"/>
+              <a:ext cx="590550" cy="381000"/>
+            </a:xfrm>
+            <a:prstGeom xmlns:a="http://schemas.openxmlformats.org/drawingml/2006/main" prst="roundRect">
+              <a:avLst>
+                <a:gd name="adj" fmla="val 20000"/>
+              </a:avLst>
+            </a:prstGeom>
+            <a:solidFill xmlns:a="http://schemas.openxmlformats.org/drawingml/2006/main">
+              <a:srgbClr val="FFFFFF"/>
+            </a:solidFill>
+            <a:ln xmlns:a="http://schemas.openxmlformats.org/drawingml/2006/main" w="19050">
+              <a:solidFill>
+                <a:srgbClr val="6E65A0"/>
+              </a:solidFill>
+            </a:ln>
+          </p:spPr>
+          <p:txBody>
+            <a:bodyPr xmlns:a="http://schemas.openxmlformats.org/drawingml/2006/main" lIns="9525" tIns="9525" rIns="9525" bIns="9525"/>
+            <a:lstStyle xmlns:a="http://schemas.openxmlformats.org/drawingml/2006/main">
+              <a:defPPr algn="ctr">
+                <a:defRPr sz="1125">
+                  <a:solidFill>
+                    <a:srgbClr val="302850"/>
+                  </a:solidFill>
+                </a:defRPr>
+              </a:defPPr>
+            </a:lstStyle>
+            <a:p xmlns:a="http://schemas.openxmlformats.org/drawingml/2006/main">
+              <a:pPr algn="ctr">
+                <a:defRPr sz="1125">
+                  <a:solidFill>
+                    <a:srgbClr val="302850"/>
+                  </a:solidFill>
+                </a:defRPr>
+              </a:pPr>
+              <a:r>
+                <a:rPr sz="1125">
+                  <a:solidFill>
+                    <a:srgbClr val="302850"/>
+                  </a:solidFill>
+                </a:rPr>
+                <a:t>state</a:t>
+              </a:r>
+            </a:p>
+          </p:txBody>
+        </p:sp>
+        <p:sp>
+          <p:nvSpPr>
+            <p:cNvPr id="108" name="decision-input">
+              <a:extLst xmlns:a="http://schemas.openxmlformats.org/drawingml/2006/main">
+                <a:ext uri="{FF2B5EF4-FFF2-40B4-BE49-F238E27FC236}">
+                  <a16:creationId xmlns:a16="http://schemas.microsoft.com/office/drawing/2014/main" id="{10E8AEA5-D233-4A90-BBB4-0A0E91DDC066}"/>
+                </a:ext>
+              </a:extLst>
+            </p:cNvPr>
+            <p:cNvSpPr>
+              <a:spLocks xmlns:a="http://schemas.openxmlformats.org/drawingml/2006/main" noGrp="1"/>
+            </p:cNvSpPr>
+            <p:nvPr/>
+          </p:nvSpPr>
+          <p:spPr>
+            <a:xfrm xmlns:a="http://schemas.openxmlformats.org/drawingml/2006/main">
+              <a:off x="13430250" y="1981200"/>
+              <a:ext cx="590550" cy="333375"/>
+            </a:xfrm>
+            <a:prstGeom xmlns:a="http://schemas.openxmlformats.org/drawingml/2006/main" prst="roundRect">
+              <a:avLst>
+                <a:gd name="adj" fmla="val 22857"/>
+              </a:avLst>
+            </a:prstGeom>
+            <a:solidFill xmlns:a="http://schemas.openxmlformats.org/drawingml/2006/main">
+              <a:srgbClr val="FFFFFF"/>
+            </a:solidFill>
+            <a:ln xmlns:a="http://schemas.openxmlformats.org/drawingml/2006/main" w="19050">
+              <a:solidFill>
+                <a:srgbClr val="6E65A0"/>
+              </a:solidFill>
+            </a:ln>
+          </p:spPr>
+          <p:txBody>
+            <a:bodyPr xmlns:a="http://schemas.openxmlformats.org/drawingml/2006/main" lIns="9525" tIns="9525" rIns="9525" bIns="9525"/>
+            <a:lstStyle xmlns:a="http://schemas.openxmlformats.org/drawingml/2006/main">
+              <a:defPPr algn="ctr">
+                <a:defRPr sz="1125">
+                  <a:solidFill>
+                    <a:srgbClr val="302850"/>
+                  </a:solidFill>
+                </a:defRPr>
+              </a:defPPr>
+            </a:lstStyle>
+            <a:p xmlns:a="http://schemas.openxmlformats.org/drawingml/2006/main">
+              <a:pPr algn="ctr">
+                <a:defRPr sz="1125">
+                  <a:solidFill>
+                    <a:srgbClr val="302850"/>
+                  </a:solidFill>
+                </a:defRPr>
+              </a:pPr>
+              <a:r>
+                <a:rPr sz="1050">
+                  <a:solidFill>
+                    <a:srgbClr val="302850"/>
+                  </a:solidFill>
+                </a:rPr>
+                <a:t>action A</a:t>
+              </a:r>
+            </a:p>
+          </p:txBody>
+        </p:sp>
+        <p:sp>
+          <p:nvSpPr>
+            <p:cNvPr id="109" name="decision-input">
+              <a:extLst xmlns:a="http://schemas.openxmlformats.org/drawingml/2006/main">
+                <a:ext uri="{FF2B5EF4-FFF2-40B4-BE49-F238E27FC236}">
+                  <a16:creationId xmlns:a16="http://schemas.microsoft.com/office/drawing/2014/main" id="{F5CF1C6F-3E8A-4C17-8A6F-7A8C2B7FE2BD}"/>
+                </a:ext>
+              </a:extLst>
+            </p:cNvPr>
+            <p:cNvSpPr>
+              <a:spLocks xmlns:a="http://schemas.openxmlformats.org/drawingml/2006/main" noGrp="1"/>
+            </p:cNvSpPr>
+            <p:nvPr/>
+          </p:nvSpPr>
+          <p:spPr>
+            <a:xfrm xmlns:a="http://schemas.openxmlformats.org/drawingml/2006/main">
+              <a:off x="13430250" y="2609850"/>
+              <a:ext cx="590550" cy="333375"/>
+            </a:xfrm>
+            <a:prstGeom xmlns:a="http://schemas.openxmlformats.org/drawingml/2006/main" prst="roundRect">
+              <a:avLst>
+                <a:gd name="adj" fmla="val 22857"/>
+              </a:avLst>
+            </a:prstGeom>
+            <a:solidFill xmlns:a="http://schemas.openxmlformats.org/drawingml/2006/main">
+              <a:srgbClr val="D8D1E9"/>
+            </a:solidFill>
+            <a:ln xmlns:a="http://schemas.openxmlformats.org/drawingml/2006/main" w="19050">
+              <a:solidFill>
+                <a:srgbClr val="6E65A0"/>
+              </a:solidFill>
+            </a:ln>
+          </p:spPr>
+          <p:txBody>
+            <a:bodyPr xmlns:a="http://schemas.openxmlformats.org/drawingml/2006/main" lIns="9525" tIns="9525" rIns="9525" bIns="9525"/>
+            <a:lstStyle xmlns:a="http://schemas.openxmlformats.org/drawingml/2006/main">
+              <a:defPPr algn="ctr">
+                <a:defRPr sz="1125">
+                  <a:solidFill>
+                    <a:srgbClr val="302850"/>
+                  </a:solidFill>
+                </a:defRPr>
+              </a:defPPr>
+            </a:lstStyle>
+            <a:p xmlns:a="http://schemas.openxmlformats.org/drawingml/2006/main">
+              <a:pPr algn="ctr">
+                <a:defRPr sz="1125">
+                  <a:solidFill>
+                    <a:srgbClr val="302850"/>
+                  </a:solidFill>
+                </a:defRPr>
+              </a:pPr>
+              <a:r>
+                <a:rPr sz="1050">
+                  <a:solidFill>
+                    <a:srgbClr val="302850"/>
+                  </a:solidFill>
+                </a:rPr>
+                <a:t>action B</a:t>
+              </a:r>
+            </a:p>
+          </p:txBody>
+        </p:sp>
+        <p:sp>
+          <p:nvSpPr>
+            <p:cNvPr id="110" name="forecast-output">
+              <a:extLst xmlns:a="http://schemas.openxmlformats.org/drawingml/2006/main">
+                <a:ext uri="{FF2B5EF4-FFF2-40B4-BE49-F238E27FC236}">
+                  <a16:creationId xmlns:a16="http://schemas.microsoft.com/office/drawing/2014/main" id="{98025D42-C0C0-4A75-9D84-EF656F93B9A3}"/>
+                </a:ext>
+              </a:extLst>
+            </p:cNvPr>
+            <p:cNvSpPr>
+              <a:spLocks xmlns:a="http://schemas.openxmlformats.org/drawingml/2006/main" noGrp="1"/>
+            </p:cNvSpPr>
+            <p:nvPr/>
+          </p:nvSpPr>
+          <p:spPr>
+            <a:xfrm xmlns:a="http://schemas.openxmlformats.org/drawingml/2006/main" flipV="0">
+              <a:off x="2857500" y="6296025"/>
+              <a:ext cx="95" cy="571500"/>
+            </a:xfrm>
+            <a:prstGeom xmlns:a="http://schemas.openxmlformats.org/drawingml/2006/main" prst="line">
+              <a:avLst/>
+            </a:prstGeom>
+            <a:noFill xmlns:a="http://schemas.openxmlformats.org/drawingml/2006/main"/>
+            <a:ln xmlns:a="http://schemas.openxmlformats.org/drawingml/2006/main" w="9525">
+              <a:solidFill>
+                <a:srgbClr val="747B80"/>
+              </a:solidFill>
+            </a:ln>
+          </p:spPr>
+        </p:sp>
+        <p:sp>
+          <p:nvSpPr>
+            <p:cNvPr id="111" name="forecast-output">
+              <a:extLst xmlns:a="http://schemas.openxmlformats.org/drawingml/2006/main">
+                <a:ext uri="{FF2B5EF4-FFF2-40B4-BE49-F238E27FC236}">
+                  <a16:creationId xmlns:a16="http://schemas.microsoft.com/office/drawing/2014/main" id="{C78A74AA-A2CF-487E-9FFA-853D9841AE7B}"/>
+                </a:ext>
+              </a:extLst>
+            </p:cNvPr>
+            <p:cNvSpPr>
+              <a:spLocks xmlns:a="http://schemas.openxmlformats.org/drawingml/2006/main" noGrp="1"/>
+            </p:cNvSpPr>
+            <p:nvPr/>
+          </p:nvSpPr>
+          <p:spPr>
+            <a:xfrm xmlns:a="http://schemas.openxmlformats.org/drawingml/2006/main" flipV="0">
+              <a:off x="2857500" y="6867525"/>
+              <a:ext cx="1714500" cy="95"/>
+            </a:xfrm>
+            <a:prstGeom xmlns:a="http://schemas.openxmlformats.org/drawingml/2006/main" prst="line">
+              <a:avLst/>
+            </a:prstGeom>
+            <a:noFill xmlns:a="http://schemas.openxmlformats.org/drawingml/2006/main"/>
+            <a:ln xmlns:a="http://schemas.openxmlformats.org/drawingml/2006/main" w="9525">
+              <a:solidFill>
+                <a:srgbClr val="747B80"/>
+              </a:solidFill>
+            </a:ln>
+          </p:spPr>
+        </p:sp>
+        <p:sp>
+          <p:nvSpPr>
+            <p:cNvPr id="112" name="forecast-output">
+              <a:extLst xmlns:a="http://schemas.openxmlformats.org/drawingml/2006/main">
+                <a:ext uri="{FF2B5EF4-FFF2-40B4-BE49-F238E27FC236}">
+                  <a16:creationId xmlns:a16="http://schemas.microsoft.com/office/drawing/2014/main" id="{7D2BF5FE-34D6-41AD-9BFB-95D1372BB15D}"/>
+                </a:ext>
+              </a:extLst>
+            </p:cNvPr>
+            <p:cNvSpPr>
+              <a:spLocks xmlns:a="http://schemas.openxmlformats.org/drawingml/2006/main" noGrp="1"/>
+            </p:cNvSpPr>
+            <p:nvPr/>
+          </p:nvSpPr>
+          <p:spPr>
+            <a:xfrm xmlns:a="http://schemas.openxmlformats.org/drawingml/2006/main" flipV="1">
+              <a:off x="2857500" y="6684645"/>
+              <a:ext cx="244929" cy="57150"/>
+            </a:xfrm>
+            <a:prstGeom xmlns:a="http://schemas.openxmlformats.org/drawingml/2006/main" prst="line">
+              <a:avLst/>
+            </a:prstGeom>
+            <a:noFill xmlns:a="http://schemas.openxmlformats.org/drawingml/2006/main"/>
+            <a:ln xmlns:a="http://schemas.openxmlformats.org/drawingml/2006/main" w="24765">
+              <a:solidFill>
+                <a:srgbClr val="B17E2C"/>
+              </a:solidFill>
+            </a:ln>
+          </p:spPr>
+        </p:sp>
+        <p:sp>
+          <p:nvSpPr>
+            <p:cNvPr id="113" name="forecast-output">
+              <a:extLst xmlns:a="http://schemas.openxmlformats.org/drawingml/2006/main">
+                <a:ext uri="{FF2B5EF4-FFF2-40B4-BE49-F238E27FC236}">
+                  <a16:creationId xmlns:a16="http://schemas.microsoft.com/office/drawing/2014/main" id="{7CCCBB98-670C-4C65-8A27-F3235FD540F2}"/>
+                </a:ext>
+              </a:extLst>
+            </p:cNvPr>
+            <p:cNvSpPr>
+              <a:spLocks xmlns:a="http://schemas.openxmlformats.org/drawingml/2006/main" noGrp="1"/>
+            </p:cNvSpPr>
+            <p:nvPr/>
+          </p:nvSpPr>
+          <p:spPr>
+            <a:xfrm xmlns:a="http://schemas.openxmlformats.org/drawingml/2006/main" flipV="1">
+              <a:off x="3102429" y="6593205"/>
+              <a:ext cx="244929" cy="91440"/>
+            </a:xfrm>
+            <a:prstGeom xmlns:a="http://schemas.openxmlformats.org/drawingml/2006/main" prst="line">
+              <a:avLst/>
+            </a:prstGeom>
+            <a:noFill xmlns:a="http://schemas.openxmlformats.org/drawingml/2006/main"/>
+            <a:ln xmlns:a="http://schemas.openxmlformats.org/drawingml/2006/main" w="24765">
+              <a:solidFill>
+                <a:srgbClr val="B17E2C"/>
+              </a:solidFill>
+            </a:ln>
+          </p:spPr>
+        </p:sp>
+        <p:sp>
+          <p:nvSpPr>
+            <p:cNvPr id="114" name="forecast-output">
+              <a:extLst xmlns:a="http://schemas.openxmlformats.org/drawingml/2006/main">
+                <a:ext uri="{FF2B5EF4-FFF2-40B4-BE49-F238E27FC236}">
+                  <a16:creationId xmlns:a16="http://schemas.microsoft.com/office/drawing/2014/main" id="{4BF4AD4A-A158-4CFC-9B6E-49236455B610}"/>
+                </a:ext>
+              </a:extLst>
+            </p:cNvPr>
+            <p:cNvSpPr>
+              <a:spLocks xmlns:a="http://schemas.openxmlformats.org/drawingml/2006/main" noGrp="1"/>
+            </p:cNvSpPr>
+            <p:nvPr/>
+          </p:nvSpPr>
+          <p:spPr>
+            <a:xfrm xmlns:a="http://schemas.openxmlformats.org/drawingml/2006/main" flipV="0">
+              <a:off x="3347357" y="6593205"/>
+              <a:ext cx="244929" cy="28575"/>
+            </a:xfrm>
+            <a:prstGeom xmlns:a="http://schemas.openxmlformats.org/drawingml/2006/main" prst="line">
+              <a:avLst/>
+            </a:prstGeom>
+            <a:noFill xmlns:a="http://schemas.openxmlformats.org/drawingml/2006/main"/>
+            <a:ln xmlns:a="http://schemas.openxmlformats.org/drawingml/2006/main" w="24765">
+              <a:solidFill>
+                <a:srgbClr val="B17E2C"/>
+              </a:solidFill>
+            </a:ln>
+          </p:spPr>
+        </p:sp>
+        <p:sp>
+          <p:nvSpPr>
+            <p:cNvPr id="115" name="forecast-output">
+              <a:extLst xmlns:a="http://schemas.openxmlformats.org/drawingml/2006/main">
+                <a:ext uri="{FF2B5EF4-FFF2-40B4-BE49-F238E27FC236}">
+                  <a16:creationId xmlns:a16="http://schemas.microsoft.com/office/drawing/2014/main" id="{56575FB9-04BF-437A-9B93-B14BBCF06961}"/>
+                </a:ext>
+              </a:extLst>
+            </p:cNvPr>
+            <p:cNvSpPr>
+              <a:spLocks xmlns:a="http://schemas.openxmlformats.org/drawingml/2006/main" noGrp="1"/>
+            </p:cNvSpPr>
+            <p:nvPr/>
+          </p:nvSpPr>
+          <p:spPr>
+            <a:xfrm xmlns:a="http://schemas.openxmlformats.org/drawingml/2006/main" flipV="1">
+              <a:off x="3592286" y="6513195"/>
+              <a:ext cx="244929" cy="108585"/>
+            </a:xfrm>
+            <a:prstGeom xmlns:a="http://schemas.openxmlformats.org/drawingml/2006/main" prst="line">
+              <a:avLst/>
+            </a:prstGeom>
+            <a:noFill xmlns:a="http://schemas.openxmlformats.org/drawingml/2006/main"/>
+            <a:ln xmlns:a="http://schemas.openxmlformats.org/drawingml/2006/main" w="24765">
+              <a:solidFill>
+                <a:srgbClr val="B17E2C"/>
+              </a:solidFill>
+            </a:ln>
+          </p:spPr>
+        </p:sp>
+        <p:sp>
+          <p:nvSpPr>
+            <p:cNvPr id="116" name="forecast-output">
+              <a:extLst xmlns:a="http://schemas.openxmlformats.org/drawingml/2006/main">
+                <a:ext uri="{FF2B5EF4-FFF2-40B4-BE49-F238E27FC236}">
+                  <a16:creationId xmlns:a16="http://schemas.microsoft.com/office/drawing/2014/main" id="{64AB02E7-2360-4A30-9B98-65AD64714264}"/>
+                </a:ext>
+              </a:extLst>
+            </p:cNvPr>
+            <p:cNvSpPr>
+              <a:spLocks xmlns:a="http://schemas.openxmlformats.org/drawingml/2006/main" noGrp="1"/>
+            </p:cNvSpPr>
+            <p:nvPr/>
+          </p:nvSpPr>
+          <p:spPr>
+            <a:xfrm xmlns:a="http://schemas.openxmlformats.org/drawingml/2006/main" flipV="1">
+              <a:off x="3837214" y="6467475"/>
+              <a:ext cx="244929" cy="45720"/>
+            </a:xfrm>
+            <a:prstGeom xmlns:a="http://schemas.openxmlformats.org/drawingml/2006/main" prst="line">
+              <a:avLst/>
+            </a:prstGeom>
+            <a:noFill xmlns:a="http://schemas.openxmlformats.org/drawingml/2006/main"/>
+            <a:ln xmlns:a="http://schemas.openxmlformats.org/drawingml/2006/main" w="24765">
+              <a:solidFill>
+                <a:srgbClr val="B17E2C"/>
+              </a:solidFill>
+            </a:ln>
+          </p:spPr>
+        </p:sp>
+        <p:sp>
+          <p:nvSpPr>
+            <p:cNvPr id="117" name="forecast-output">
+              <a:extLst xmlns:a="http://schemas.openxmlformats.org/drawingml/2006/main">
+                <a:ext uri="{FF2B5EF4-FFF2-40B4-BE49-F238E27FC236}">
+                  <a16:creationId xmlns:a16="http://schemas.microsoft.com/office/drawing/2014/main" id="{B8FAB61B-939D-4CBB-B728-C3225C6255FC}"/>
+                </a:ext>
+              </a:extLst>
+            </p:cNvPr>
+            <p:cNvSpPr>
+              <a:spLocks xmlns:a="http://schemas.openxmlformats.org/drawingml/2006/main" noGrp="1"/>
+            </p:cNvSpPr>
+            <p:nvPr/>
+          </p:nvSpPr>
+          <p:spPr>
+            <a:xfrm xmlns:a="http://schemas.openxmlformats.org/drawingml/2006/main" flipV="0">
+              <a:off x="4082143" y="6467475"/>
+              <a:ext cx="244929" cy="28575"/>
+            </a:xfrm>
+            <a:prstGeom xmlns:a="http://schemas.openxmlformats.org/drawingml/2006/main" prst="line">
+              <a:avLst/>
+            </a:prstGeom>
+            <a:noFill xmlns:a="http://schemas.openxmlformats.org/drawingml/2006/main"/>
+            <a:ln xmlns:a="http://schemas.openxmlformats.org/drawingml/2006/main" w="24765">
+              <a:solidFill>
+                <a:srgbClr val="B17E2C"/>
+              </a:solidFill>
+            </a:ln>
+          </p:spPr>
+        </p:sp>
+        <p:sp>
+          <p:nvSpPr>
+            <p:cNvPr id="118" name="forecast-output">
+              <a:extLst xmlns:a="http://schemas.openxmlformats.org/drawingml/2006/main">
+                <a:ext uri="{FF2B5EF4-FFF2-40B4-BE49-F238E27FC236}">
+                  <a16:creationId xmlns:a16="http://schemas.microsoft.com/office/drawing/2014/main" id="{1173B59A-F2EF-49C5-921B-3CB607677E9D}"/>
+                </a:ext>
+              </a:extLst>
+            </p:cNvPr>
+            <p:cNvSpPr>
+              <a:spLocks xmlns:a="http://schemas.openxmlformats.org/drawingml/2006/main" noGrp="1"/>
+            </p:cNvSpPr>
+            <p:nvPr/>
+          </p:nvSpPr>
+          <p:spPr>
+            <a:xfrm xmlns:a="http://schemas.openxmlformats.org/drawingml/2006/main" flipV="1">
+              <a:off x="4327071" y="6393180"/>
+              <a:ext cx="244929" cy="102870"/>
+            </a:xfrm>
+            <a:prstGeom xmlns:a="http://schemas.openxmlformats.org/drawingml/2006/main" prst="line">
+              <a:avLst/>
+            </a:prstGeom>
+            <a:noFill xmlns:a="http://schemas.openxmlformats.org/drawingml/2006/main"/>
+            <a:ln xmlns:a="http://schemas.openxmlformats.org/drawingml/2006/main" w="24765">
+              <a:solidFill>
+                <a:srgbClr val="B17E2C"/>
+              </a:solidFill>
+            </a:ln>
+          </p:spPr>
+        </p:sp>
+        <p:sp>
+          <p:nvSpPr>
+            <p:cNvPr id="119" name="synthesis-output">
+              <a:extLst xmlns:a="http://schemas.openxmlformats.org/drawingml/2006/main">
+                <a:ext uri="{FF2B5EF4-FFF2-40B4-BE49-F238E27FC236}">
+                  <a16:creationId xmlns:a16="http://schemas.microsoft.com/office/drawing/2014/main" id="{8D3C7AA8-2E3B-4F6A-98BC-B05DDCFC12DC}"/>
+                </a:ext>
+              </a:extLst>
+            </p:cNvPr>
+            <p:cNvSpPr>
+              <a:spLocks xmlns:a="http://schemas.openxmlformats.org/drawingml/2006/main" noGrp="1"/>
+            </p:cNvSpPr>
+            <p:nvPr/>
+          </p:nvSpPr>
+          <p:spPr>
+            <a:xfrm xmlns:a="http://schemas.openxmlformats.org/drawingml/2006/main" flipV="1">
+              <a:off x="6000750" y="6391275"/>
+              <a:ext cx="190500" cy="47625"/>
+            </a:xfrm>
+            <a:prstGeom xmlns:a="http://schemas.openxmlformats.org/drawingml/2006/main" prst="line">
+              <a:avLst/>
+            </a:prstGeom>
+            <a:noFill xmlns:a="http://schemas.openxmlformats.org/drawingml/2006/main"/>
+            <a:ln xmlns:a="http://schemas.openxmlformats.org/drawingml/2006/main" w="24765">
+              <a:solidFill>
+                <a:srgbClr val="3D896D"/>
+              </a:solidFill>
+            </a:ln>
+          </p:spPr>
+        </p:sp>
+        <p:sp>
+          <p:nvSpPr>
+            <p:cNvPr id="120" name="synthesis-output">
+              <a:extLst xmlns:a="http://schemas.openxmlformats.org/drawingml/2006/main">
+                <a:ext uri="{FF2B5EF4-FFF2-40B4-BE49-F238E27FC236}">
+                  <a16:creationId xmlns:a16="http://schemas.microsoft.com/office/drawing/2014/main" id="{A0EB7F50-CE09-4510-A670-5BAB765F0526}"/>
+                </a:ext>
+              </a:extLst>
+            </p:cNvPr>
+            <p:cNvSpPr>
+              <a:spLocks xmlns:a="http://schemas.openxmlformats.org/drawingml/2006/main" noGrp="1"/>
+            </p:cNvSpPr>
+            <p:nvPr/>
+          </p:nvSpPr>
+          <p:spPr>
+            <a:xfrm xmlns:a="http://schemas.openxmlformats.org/drawingml/2006/main" flipV="1">
+              <a:off x="6191250" y="6319838"/>
+              <a:ext cx="190500" cy="71438"/>
+            </a:xfrm>
+            <a:prstGeom xmlns:a="http://schemas.openxmlformats.org/drawingml/2006/main" prst="line">
+              <a:avLst/>
+            </a:prstGeom>
+            <a:noFill xmlns:a="http://schemas.openxmlformats.org/drawingml/2006/main"/>
+            <a:ln xmlns:a="http://schemas.openxmlformats.org/drawingml/2006/main" w="24765">
+              <a:solidFill>
+                <a:srgbClr val="3D896D"/>
+              </a:solidFill>
+            </a:ln>
+          </p:spPr>
+        </p:sp>
+        <p:sp>
+          <p:nvSpPr>
+            <p:cNvPr id="121" name="synthesis-output">
+              <a:extLst xmlns:a="http://schemas.openxmlformats.org/drawingml/2006/main">
+                <a:ext uri="{FF2B5EF4-FFF2-40B4-BE49-F238E27FC236}">
+                  <a16:creationId xmlns:a16="http://schemas.microsoft.com/office/drawing/2014/main" id="{63F83D01-13A2-4913-A76B-5FC9A2421396}"/>
+                </a:ext>
+              </a:extLst>
+            </p:cNvPr>
+            <p:cNvSpPr>
+              <a:spLocks xmlns:a="http://schemas.openxmlformats.org/drawingml/2006/main" noGrp="1"/>
+            </p:cNvSpPr>
+            <p:nvPr/>
+          </p:nvSpPr>
+          <p:spPr>
+            <a:xfrm xmlns:a="http://schemas.openxmlformats.org/drawingml/2006/main" flipV="0">
+              <a:off x="6381750" y="6319838"/>
+              <a:ext cx="190500" cy="23813"/>
+            </a:xfrm>
+            <a:prstGeom xmlns:a="http://schemas.openxmlformats.org/drawingml/2006/main" prst="line">
+              <a:avLst/>
+            </a:prstGeom>
+            <a:noFill xmlns:a="http://schemas.openxmlformats.org/drawingml/2006/main"/>
+            <a:ln xmlns:a="http://schemas.openxmlformats.org/drawingml/2006/main" w="24765">
+              <a:solidFill>
+                <a:srgbClr val="3D896D"/>
+              </a:solidFill>
+            </a:ln>
+          </p:spPr>
+        </p:sp>
+        <p:sp>
+          <p:nvSpPr>
+            <p:cNvPr id="122" name="synthesis-output">
+              <a:extLst xmlns:a="http://schemas.openxmlformats.org/drawingml/2006/main">
+                <a:ext uri="{FF2B5EF4-FFF2-40B4-BE49-F238E27FC236}">
+                  <a16:creationId xmlns:a16="http://schemas.microsoft.com/office/drawing/2014/main" id="{6498977C-20C7-46F2-8334-E138C88B0FB1}"/>
+                </a:ext>
+              </a:extLst>
+            </p:cNvPr>
+            <p:cNvSpPr>
+              <a:spLocks xmlns:a="http://schemas.openxmlformats.org/drawingml/2006/main" noGrp="1"/>
+            </p:cNvSpPr>
+            <p:nvPr/>
+          </p:nvSpPr>
+          <p:spPr>
+            <a:xfrm xmlns:a="http://schemas.openxmlformats.org/drawingml/2006/main" flipV="0">
+              <a:off x="6572250" y="6343650"/>
+              <a:ext cx="190500" cy="71438"/>
+            </a:xfrm>
+            <a:prstGeom xmlns:a="http://schemas.openxmlformats.org/drawingml/2006/main" prst="line">
+              <a:avLst/>
+            </a:prstGeom>
+            <a:noFill xmlns:a="http://schemas.openxmlformats.org/drawingml/2006/main"/>
+            <a:ln xmlns:a="http://schemas.openxmlformats.org/drawingml/2006/main" w="24765">
+              <a:solidFill>
+                <a:srgbClr val="3D896D"/>
+              </a:solidFill>
+            </a:ln>
+          </p:spPr>
+        </p:sp>
+        <p:sp>
+          <p:nvSpPr>
+            <p:cNvPr id="123" name="synthesis-output">
+              <a:extLst xmlns:a="http://schemas.openxmlformats.org/drawingml/2006/main">
+                <a:ext uri="{FF2B5EF4-FFF2-40B4-BE49-F238E27FC236}">
+                  <a16:creationId xmlns:a16="http://schemas.microsoft.com/office/drawing/2014/main" id="{2E9BABBC-AAD8-45FD-A590-79F57A2F772C}"/>
+                </a:ext>
+              </a:extLst>
+            </p:cNvPr>
+            <p:cNvSpPr>
+              <a:spLocks xmlns:a="http://schemas.openxmlformats.org/drawingml/2006/main" noGrp="1"/>
+            </p:cNvSpPr>
+            <p:nvPr/>
+          </p:nvSpPr>
+          <p:spPr>
+            <a:xfrm xmlns:a="http://schemas.openxmlformats.org/drawingml/2006/main" flipV="1">
+              <a:off x="6762750" y="6367463"/>
+              <a:ext cx="190500" cy="47625"/>
+            </a:xfrm>
+            <a:prstGeom xmlns:a="http://schemas.openxmlformats.org/drawingml/2006/main" prst="line">
+              <a:avLst/>
+            </a:prstGeom>
+            <a:noFill xmlns:a="http://schemas.openxmlformats.org/drawingml/2006/main"/>
+            <a:ln xmlns:a="http://schemas.openxmlformats.org/drawingml/2006/main" w="24765">
+              <a:solidFill>
+                <a:srgbClr val="3D896D"/>
+              </a:solidFill>
+            </a:ln>
+          </p:spPr>
+        </p:sp>
+        <p:sp>
+          <p:nvSpPr>
+            <p:cNvPr id="124" name="synthesis-output">
+              <a:extLst xmlns:a="http://schemas.openxmlformats.org/drawingml/2006/main">
+                <a:ext uri="{FF2B5EF4-FFF2-40B4-BE49-F238E27FC236}">
+                  <a16:creationId xmlns:a16="http://schemas.microsoft.com/office/drawing/2014/main" id="{CE68C995-1DC5-4214-B4F0-3C0D4318A4C9}"/>
+                </a:ext>
+              </a:extLst>
+            </p:cNvPr>
+            <p:cNvSpPr>
+              <a:spLocks xmlns:a="http://schemas.openxmlformats.org/drawingml/2006/main" noGrp="1"/>
+            </p:cNvSpPr>
+            <p:nvPr/>
+          </p:nvSpPr>
+          <p:spPr>
+            <a:xfrm xmlns:a="http://schemas.openxmlformats.org/drawingml/2006/main" flipV="1">
+              <a:off x="6953250" y="6296025"/>
+              <a:ext cx="190500" cy="71438"/>
+            </a:xfrm>
+            <a:prstGeom xmlns:a="http://schemas.openxmlformats.org/drawingml/2006/main" prst="line">
+              <a:avLst/>
+            </a:prstGeom>
+            <a:noFill xmlns:a="http://schemas.openxmlformats.org/drawingml/2006/main"/>
+            <a:ln xmlns:a="http://schemas.openxmlformats.org/drawingml/2006/main" w="24765">
+              <a:solidFill>
+                <a:srgbClr val="3D896D"/>
+              </a:solidFill>
+            </a:ln>
+          </p:spPr>
+        </p:sp>
+        <p:sp>
+          <p:nvSpPr>
+            <p:cNvPr id="125" name="synthesis-output">
+              <a:extLst xmlns:a="http://schemas.openxmlformats.org/drawingml/2006/main">
+                <a:ext uri="{FF2B5EF4-FFF2-40B4-BE49-F238E27FC236}">
+                  <a16:creationId xmlns:a16="http://schemas.microsoft.com/office/drawing/2014/main" id="{908D539D-2C68-4BC3-A0E4-45BDCDD7A07E}"/>
+                </a:ext>
+              </a:extLst>
+            </p:cNvPr>
+            <p:cNvSpPr>
+              <a:spLocks xmlns:a="http://schemas.openxmlformats.org/drawingml/2006/main" noGrp="1"/>
+            </p:cNvSpPr>
+            <p:nvPr/>
+          </p:nvSpPr>
+          <p:spPr>
+            <a:xfrm xmlns:a="http://schemas.openxmlformats.org/drawingml/2006/main" flipV="0">
+              <a:off x="7143750" y="6296025"/>
+              <a:ext cx="190500" cy="23813"/>
+            </a:xfrm>
+            <a:prstGeom xmlns:a="http://schemas.openxmlformats.org/drawingml/2006/main" prst="line">
+              <a:avLst/>
+            </a:prstGeom>
+            <a:noFill xmlns:a="http://schemas.openxmlformats.org/drawingml/2006/main"/>
+            <a:ln xmlns:a="http://schemas.openxmlformats.org/drawingml/2006/main" w="24765">
+              <a:solidFill>
+                <a:srgbClr val="3D896D"/>
+              </a:solidFill>
+            </a:ln>
+          </p:spPr>
+        </p:sp>
+        <p:sp>
+          <p:nvSpPr>
+            <p:cNvPr id="126" name="synthesis-output">
+              <a:extLst xmlns:a="http://schemas.openxmlformats.org/drawingml/2006/main">
+                <a:ext uri="{FF2B5EF4-FFF2-40B4-BE49-F238E27FC236}">
+                  <a16:creationId xmlns:a16="http://schemas.microsoft.com/office/drawing/2014/main" id="{7EA97E5B-C3C4-4BF4-890F-B4EDFD4D3332}"/>
+                </a:ext>
+              </a:extLst>
+            </p:cNvPr>
+            <p:cNvSpPr>
+              <a:spLocks xmlns:a="http://schemas.openxmlformats.org/drawingml/2006/main" noGrp="1"/>
+            </p:cNvSpPr>
+            <p:nvPr/>
+          </p:nvSpPr>
+          <p:spPr>
+            <a:xfrm xmlns:a="http://schemas.openxmlformats.org/drawingml/2006/main" flipV="1">
+              <a:off x="6000750" y="6591300"/>
+              <a:ext cx="190500" cy="47625"/>
+            </a:xfrm>
+            <a:prstGeom xmlns:a="http://schemas.openxmlformats.org/drawingml/2006/main" prst="line">
+              <a:avLst/>
+            </a:prstGeom>
+            <a:noFill xmlns:a="http://schemas.openxmlformats.org/drawingml/2006/main"/>
+            <a:ln xmlns:a="http://schemas.openxmlformats.org/drawingml/2006/main" w="24765">
+              <a:solidFill>
+                <a:srgbClr val="3D896D"/>
+              </a:solidFill>
+            </a:ln>
+          </p:spPr>
+        </p:sp>
+        <p:sp>
+          <p:nvSpPr>
+            <p:cNvPr id="127" name="synthesis-output">
+              <a:extLst xmlns:a="http://schemas.openxmlformats.org/drawingml/2006/main">
+                <a:ext uri="{FF2B5EF4-FFF2-40B4-BE49-F238E27FC236}">
+                  <a16:creationId xmlns:a16="http://schemas.microsoft.com/office/drawing/2014/main" id="{7BE21651-276D-45BC-A703-20CC7D15F5B2}"/>
+                </a:ext>
+              </a:extLst>
+            </p:cNvPr>
+            <p:cNvSpPr>
+              <a:spLocks xmlns:a="http://schemas.openxmlformats.org/drawingml/2006/main" noGrp="1"/>
+            </p:cNvSpPr>
+            <p:nvPr/>
+          </p:nvSpPr>
+          <p:spPr>
+            <a:xfrm xmlns:a="http://schemas.openxmlformats.org/drawingml/2006/main" flipV="1">
+              <a:off x="6191250" y="6519863"/>
+              <a:ext cx="190500" cy="71438"/>
+            </a:xfrm>
+            <a:prstGeom xmlns:a="http://schemas.openxmlformats.org/drawingml/2006/main" prst="line">
+              <a:avLst/>
+            </a:prstGeom>
+            <a:noFill xmlns:a="http://schemas.openxmlformats.org/drawingml/2006/main"/>
+            <a:ln xmlns:a="http://schemas.openxmlformats.org/drawingml/2006/main" w="24765">
+              <a:solidFill>
+                <a:srgbClr val="3D896D"/>
+              </a:solidFill>
+            </a:ln>
+          </p:spPr>
+        </p:sp>
+        <p:sp>
+          <p:nvSpPr>
+            <p:cNvPr id="128" name="synthesis-output">
+              <a:extLst xmlns:a="http://schemas.openxmlformats.org/drawingml/2006/main">
+                <a:ext uri="{FF2B5EF4-FFF2-40B4-BE49-F238E27FC236}">
+                  <a16:creationId xmlns:a16="http://schemas.microsoft.com/office/drawing/2014/main" id="{86214577-5CBE-4B40-B676-638C641A272E}"/>
+                </a:ext>
+              </a:extLst>
+            </p:cNvPr>
+            <p:cNvSpPr>
+              <a:spLocks xmlns:a="http://schemas.openxmlformats.org/drawingml/2006/main" noGrp="1"/>
+            </p:cNvSpPr>
+            <p:nvPr/>
+          </p:nvSpPr>
+          <p:spPr>
+            <a:xfrm xmlns:a="http://schemas.openxmlformats.org/drawingml/2006/main" flipV="0">
+              <a:off x="6381750" y="6519863"/>
+              <a:ext cx="190500" cy="23813"/>
+            </a:xfrm>
+            <a:prstGeom xmlns:a="http://schemas.openxmlformats.org/drawingml/2006/main" prst="line">
+              <a:avLst/>
+            </a:prstGeom>
+            <a:noFill xmlns:a="http://schemas.openxmlformats.org/drawingml/2006/main"/>
+            <a:ln xmlns:a="http://schemas.openxmlformats.org/drawingml/2006/main" w="24765">
+              <a:solidFill>
+                <a:srgbClr val="3D896D"/>
+              </a:solidFill>
+            </a:ln>
+          </p:spPr>
+        </p:sp>
+        <p:sp>
+          <p:nvSpPr>
+            <p:cNvPr id="129" name="synthesis-output">
+              <a:extLst xmlns:a="http://schemas.openxmlformats.org/drawingml/2006/main">
+                <a:ext uri="{FF2B5EF4-FFF2-40B4-BE49-F238E27FC236}">
+                  <a16:creationId xmlns:a16="http://schemas.microsoft.com/office/drawing/2014/main" id="{106F7CB0-75AC-41D5-896E-5AFB6D6CDE34}"/>
+                </a:ext>
+              </a:extLst>
+            </p:cNvPr>
+            <p:cNvSpPr>
+              <a:spLocks xmlns:a="http://schemas.openxmlformats.org/drawingml/2006/main" noGrp="1"/>
+            </p:cNvSpPr>
+            <p:nvPr/>
+          </p:nvSpPr>
+          <p:spPr>
+            <a:xfrm xmlns:a="http://schemas.openxmlformats.org/drawingml/2006/main" flipV="0">
+              <a:off x="6572250" y="6543675"/>
+              <a:ext cx="190500" cy="71438"/>
+            </a:xfrm>
+            <a:prstGeom xmlns:a="http://schemas.openxmlformats.org/drawingml/2006/main" prst="line">
+              <a:avLst/>
+            </a:prstGeom>
+            <a:noFill xmlns:a="http://schemas.openxmlformats.org/drawingml/2006/main"/>
+            <a:ln xmlns:a="http://schemas.openxmlformats.org/drawingml/2006/main" w="24765">
+              <a:solidFill>
+                <a:srgbClr val="3D896D"/>
+              </a:solidFill>
+            </a:ln>
+          </p:spPr>
+        </p:sp>
+        <p:sp>
+          <p:nvSpPr>
+            <p:cNvPr id="130" name="synthesis-output">
+              <a:extLst xmlns:a="http://schemas.openxmlformats.org/drawingml/2006/main">
+                <a:ext uri="{FF2B5EF4-FFF2-40B4-BE49-F238E27FC236}">
+                  <a16:creationId xmlns:a16="http://schemas.microsoft.com/office/drawing/2014/main" id="{AAEAF657-7AA5-4A47-BED0-6F81DA7CBECA}"/>
+                </a:ext>
+              </a:extLst>
+            </p:cNvPr>
+            <p:cNvSpPr>
+              <a:spLocks xmlns:a="http://schemas.openxmlformats.org/drawingml/2006/main" noGrp="1"/>
+            </p:cNvSpPr>
+            <p:nvPr/>
+          </p:nvSpPr>
+          <p:spPr>
+            <a:xfrm xmlns:a="http://schemas.openxmlformats.org/drawingml/2006/main" flipV="1">
+              <a:off x="6762750" y="6567488"/>
+              <a:ext cx="190500" cy="47625"/>
+            </a:xfrm>
+            <a:prstGeom xmlns:a="http://schemas.openxmlformats.org/drawingml/2006/main" prst="line">
+              <a:avLst/>
+            </a:prstGeom>
+            <a:noFill xmlns:a="http://schemas.openxmlformats.org/drawingml/2006/main"/>
+            <a:ln xmlns:a="http://schemas.openxmlformats.org/drawingml/2006/main" w="24765">
+              <a:solidFill>
+                <a:srgbClr val="3D896D"/>
+              </a:solidFill>
+            </a:ln>
+          </p:spPr>
+        </p:sp>
+        <p:sp>
+          <p:nvSpPr>
+            <p:cNvPr id="131" name="synthesis-output">
+              <a:extLst xmlns:a="http://schemas.openxmlformats.org/drawingml/2006/main">
+                <a:ext uri="{FF2B5EF4-FFF2-40B4-BE49-F238E27FC236}">
+                  <a16:creationId xmlns:a16="http://schemas.microsoft.com/office/drawing/2014/main" id="{A252CE65-D5E8-49A0-B2E1-CD86A736BF61}"/>
+                </a:ext>
+              </a:extLst>
+            </p:cNvPr>
+            <p:cNvSpPr>
+              <a:spLocks xmlns:a="http://schemas.openxmlformats.org/drawingml/2006/main" noGrp="1"/>
+            </p:cNvSpPr>
+            <p:nvPr/>
+          </p:nvSpPr>
+          <p:spPr>
+            <a:xfrm xmlns:a="http://schemas.openxmlformats.org/drawingml/2006/main" flipV="1">
+              <a:off x="6953250" y="6496050"/>
+              <a:ext cx="190500" cy="71438"/>
+            </a:xfrm>
+            <a:prstGeom xmlns:a="http://schemas.openxmlformats.org/drawingml/2006/main" prst="line">
+              <a:avLst/>
+            </a:prstGeom>
+            <a:noFill xmlns:a="http://schemas.openxmlformats.org/drawingml/2006/main"/>
+            <a:ln xmlns:a="http://schemas.openxmlformats.org/drawingml/2006/main" w="24765">
+              <a:solidFill>
+                <a:srgbClr val="3D896D"/>
+              </a:solidFill>
+            </a:ln>
+          </p:spPr>
+        </p:sp>
+        <p:sp>
+          <p:nvSpPr>
+            <p:cNvPr id="132" name="synthesis-output">
+              <a:extLst xmlns:a="http://schemas.openxmlformats.org/drawingml/2006/main">
+                <a:ext uri="{FF2B5EF4-FFF2-40B4-BE49-F238E27FC236}">
+                  <a16:creationId xmlns:a16="http://schemas.microsoft.com/office/drawing/2014/main" id="{E11343DB-1A32-454A-98E5-F33DBFBA121D}"/>
+                </a:ext>
+              </a:extLst>
+            </p:cNvPr>
+            <p:cNvSpPr>
+              <a:spLocks xmlns:a="http://schemas.openxmlformats.org/drawingml/2006/main" noGrp="1"/>
+            </p:cNvSpPr>
+            <p:nvPr/>
+          </p:nvSpPr>
+          <p:spPr>
+            <a:xfrm xmlns:a="http://schemas.openxmlformats.org/drawingml/2006/main" flipV="0">
+              <a:off x="7143750" y="6496050"/>
+              <a:ext cx="190500" cy="23813"/>
+            </a:xfrm>
+            <a:prstGeom xmlns:a="http://schemas.openxmlformats.org/drawingml/2006/main" prst="line">
+              <a:avLst/>
+            </a:prstGeom>
+            <a:noFill xmlns:a="http://schemas.openxmlformats.org/drawingml/2006/main"/>
+            <a:ln xmlns:a="http://schemas.openxmlformats.org/drawingml/2006/main" w="24765">
+              <a:solidFill>
+                <a:srgbClr val="3D896D"/>
+              </a:solidFill>
+            </a:ln>
+          </p:spPr>
+        </p:sp>
+        <p:sp>
+          <p:nvSpPr>
+            <p:cNvPr id="133" name="synthesis-output">
+              <a:extLst xmlns:a="http://schemas.openxmlformats.org/drawingml/2006/main">
+                <a:ext uri="{FF2B5EF4-FFF2-40B4-BE49-F238E27FC236}">
+                  <a16:creationId xmlns:a16="http://schemas.microsoft.com/office/drawing/2014/main" id="{A410787A-A4A3-466A-94CA-EF0D7BBFF425}"/>
+                </a:ext>
+              </a:extLst>
+            </p:cNvPr>
+            <p:cNvSpPr>
+              <a:spLocks xmlns:a="http://schemas.openxmlformats.org/drawingml/2006/main" noGrp="1"/>
+            </p:cNvSpPr>
+            <p:nvPr/>
+          </p:nvSpPr>
+          <p:spPr>
+            <a:xfrm xmlns:a="http://schemas.openxmlformats.org/drawingml/2006/main" flipV="1">
+              <a:off x="6000750" y="6791325"/>
+              <a:ext cx="190500" cy="47625"/>
+            </a:xfrm>
+            <a:prstGeom xmlns:a="http://schemas.openxmlformats.org/drawingml/2006/main" prst="line">
+              <a:avLst/>
+            </a:prstGeom>
+            <a:noFill xmlns:a="http://schemas.openxmlformats.org/drawingml/2006/main"/>
+            <a:ln xmlns:a="http://schemas.openxmlformats.org/drawingml/2006/main" w="24765">
+              <a:solidFill>
+                <a:srgbClr val="3D896D"/>
+              </a:solidFill>
+            </a:ln>
+          </p:spPr>
+        </p:sp>
+        <p:sp>
+          <p:nvSpPr>
+            <p:cNvPr id="134" name="synthesis-output">
+              <a:extLst xmlns:a="http://schemas.openxmlformats.org/drawingml/2006/main">
+                <a:ext uri="{FF2B5EF4-FFF2-40B4-BE49-F238E27FC236}">
+                  <a16:creationId xmlns:a16="http://schemas.microsoft.com/office/drawing/2014/main" id="{87AD1851-FBA1-4799-88C7-EE9BB865D873}"/>
+                </a:ext>
+              </a:extLst>
+            </p:cNvPr>
+            <p:cNvSpPr>
+              <a:spLocks xmlns:a="http://schemas.openxmlformats.org/drawingml/2006/main" noGrp="1"/>
+            </p:cNvSpPr>
+            <p:nvPr/>
+          </p:nvSpPr>
+          <p:spPr>
+            <a:xfrm xmlns:a="http://schemas.openxmlformats.org/drawingml/2006/main" flipV="1">
+              <a:off x="6191250" y="6719888"/>
+              <a:ext cx="190500" cy="71438"/>
+            </a:xfrm>
+            <a:prstGeom xmlns:a="http://schemas.openxmlformats.org/drawingml/2006/main" prst="line">
+              <a:avLst/>
+            </a:prstGeom>
+            <a:noFill xmlns:a="http://schemas.openxmlformats.org/drawingml/2006/main"/>
+            <a:ln xmlns:a="http://schemas.openxmlformats.org/drawingml/2006/main" w="24765">
+              <a:solidFill>
+                <a:srgbClr val="3D896D"/>
+              </a:solidFill>
+            </a:ln>
+          </p:spPr>
+        </p:sp>
+        <p:sp>
+          <p:nvSpPr>
+            <p:cNvPr id="135" name="synthesis-output">
+              <a:extLst xmlns:a="http://schemas.openxmlformats.org/drawingml/2006/main">
+                <a:ext uri="{FF2B5EF4-FFF2-40B4-BE49-F238E27FC236}">
+                  <a16:creationId xmlns:a16="http://schemas.microsoft.com/office/drawing/2014/main" id="{2D0B949F-E5C1-4267-B733-923F609CFF1E}"/>
+                </a:ext>
+              </a:extLst>
+            </p:cNvPr>
+            <p:cNvSpPr>
+              <a:spLocks xmlns:a="http://schemas.openxmlformats.org/drawingml/2006/main" noGrp="1"/>
+            </p:cNvSpPr>
+            <p:nvPr/>
+          </p:nvSpPr>
+          <p:spPr>
+            <a:xfrm xmlns:a="http://schemas.openxmlformats.org/drawingml/2006/main" flipV="0">
+              <a:off x="6381750" y="6719888"/>
+              <a:ext cx="190500" cy="23813"/>
+            </a:xfrm>
+            <a:prstGeom xmlns:a="http://schemas.openxmlformats.org/drawingml/2006/main" prst="line">
+              <a:avLst/>
+            </a:prstGeom>
+            <a:noFill xmlns:a="http://schemas.openxmlformats.org/drawingml/2006/main"/>
+            <a:ln xmlns:a="http://schemas.openxmlformats.org/drawingml/2006/main" w="24765">
+              <a:solidFill>
+                <a:srgbClr val="3D896D"/>
+              </a:solidFill>
+            </a:ln>
+          </p:spPr>
+        </p:sp>
+        <p:sp>
+          <p:nvSpPr>
+            <p:cNvPr id="136" name="synthesis-output">
+              <a:extLst xmlns:a="http://schemas.openxmlformats.org/drawingml/2006/main">
+                <a:ext uri="{FF2B5EF4-FFF2-40B4-BE49-F238E27FC236}">
+                  <a16:creationId xmlns:a16="http://schemas.microsoft.com/office/drawing/2014/main" id="{F499FE74-0C66-4F85-9264-6163C138BD40}"/>
+                </a:ext>
+              </a:extLst>
+            </p:cNvPr>
+            <p:cNvSpPr>
+              <a:spLocks xmlns:a="http://schemas.openxmlformats.org/drawingml/2006/main" noGrp="1"/>
+            </p:cNvSpPr>
+            <p:nvPr/>
+          </p:nvSpPr>
+          <p:spPr>
+            <a:xfrm xmlns:a="http://schemas.openxmlformats.org/drawingml/2006/main" flipV="0">
+              <a:off x="6572250" y="6743700"/>
+              <a:ext cx="190500" cy="71438"/>
+            </a:xfrm>
+            <a:prstGeom xmlns:a="http://schemas.openxmlformats.org/drawingml/2006/main" prst="line">
+              <a:avLst/>
+            </a:prstGeom>
+            <a:noFill xmlns:a="http://schemas.openxmlformats.org/drawingml/2006/main"/>
+            <a:ln xmlns:a="http://schemas.openxmlformats.org/drawingml/2006/main" w="24765">
+              <a:solidFill>
+                <a:srgbClr val="3D896D"/>
+              </a:solidFill>
+            </a:ln>
+          </p:spPr>
+        </p:sp>
+        <p:sp>
+          <p:nvSpPr>
+            <p:cNvPr id="137" name="synthesis-output">
+              <a:extLst xmlns:a="http://schemas.openxmlformats.org/drawingml/2006/main">
+                <a:ext uri="{FF2B5EF4-FFF2-40B4-BE49-F238E27FC236}">
+                  <a16:creationId xmlns:a16="http://schemas.microsoft.com/office/drawing/2014/main" id="{E9F694FB-482B-49E8-9AB1-7BC8F83314F5}"/>
+                </a:ext>
+              </a:extLst>
+            </p:cNvPr>
+            <p:cNvSpPr>
+              <a:spLocks xmlns:a="http://schemas.openxmlformats.org/drawingml/2006/main" noGrp="1"/>
+            </p:cNvSpPr>
+            <p:nvPr/>
+          </p:nvSpPr>
+          <p:spPr>
+            <a:xfrm xmlns:a="http://schemas.openxmlformats.org/drawingml/2006/main" flipV="1">
+              <a:off x="6762750" y="6767513"/>
+              <a:ext cx="190500" cy="47625"/>
+            </a:xfrm>
+            <a:prstGeom xmlns:a="http://schemas.openxmlformats.org/drawingml/2006/main" prst="line">
+              <a:avLst/>
+            </a:prstGeom>
+            <a:noFill xmlns:a="http://schemas.openxmlformats.org/drawingml/2006/main"/>
+            <a:ln xmlns:a="http://schemas.openxmlformats.org/drawingml/2006/main" w="24765">
+              <a:solidFill>
+                <a:srgbClr val="3D896D"/>
+              </a:solidFill>
+            </a:ln>
+          </p:spPr>
+        </p:sp>
+        <p:sp>
+          <p:nvSpPr>
+            <p:cNvPr id="138" name="synthesis-output">
+              <a:extLst xmlns:a="http://schemas.openxmlformats.org/drawingml/2006/main">
+                <a:ext uri="{FF2B5EF4-FFF2-40B4-BE49-F238E27FC236}">
+                  <a16:creationId xmlns:a16="http://schemas.microsoft.com/office/drawing/2014/main" id="{CCAB66BA-611F-42A3-8927-DC4B061A4F3F}"/>
+                </a:ext>
+              </a:extLst>
+            </p:cNvPr>
+            <p:cNvSpPr>
+              <a:spLocks xmlns:a="http://schemas.openxmlformats.org/drawingml/2006/main" noGrp="1"/>
+            </p:cNvSpPr>
+            <p:nvPr/>
+          </p:nvSpPr>
+          <p:spPr>
+            <a:xfrm xmlns:a="http://schemas.openxmlformats.org/drawingml/2006/main" flipV="1">
+              <a:off x="6953250" y="6696075"/>
+              <a:ext cx="190500" cy="71438"/>
+            </a:xfrm>
+            <a:prstGeom xmlns:a="http://schemas.openxmlformats.org/drawingml/2006/main" prst="line">
+              <a:avLst/>
+            </a:prstGeom>
+            <a:noFill xmlns:a="http://schemas.openxmlformats.org/drawingml/2006/main"/>
+            <a:ln xmlns:a="http://schemas.openxmlformats.org/drawingml/2006/main" w="24765">
+              <a:solidFill>
+                <a:srgbClr val="3D896D"/>
+              </a:solidFill>
+            </a:ln>
+          </p:spPr>
+        </p:sp>
+        <p:sp>
+          <p:nvSpPr>
+            <p:cNvPr id="139" name="synthesis-output">
+              <a:extLst xmlns:a="http://schemas.openxmlformats.org/drawingml/2006/main">
+                <a:ext uri="{FF2B5EF4-FFF2-40B4-BE49-F238E27FC236}">
+                  <a16:creationId xmlns:a16="http://schemas.microsoft.com/office/drawing/2014/main" id="{F58B963F-2421-4FC2-B796-8B11DB2DE5E2}"/>
+                </a:ext>
+              </a:extLst>
+            </p:cNvPr>
+            <p:cNvSpPr>
+              <a:spLocks xmlns:a="http://schemas.openxmlformats.org/drawingml/2006/main" noGrp="1"/>
+            </p:cNvSpPr>
+            <p:nvPr/>
+          </p:nvSpPr>
+          <p:spPr>
+            <a:xfrm xmlns:a="http://schemas.openxmlformats.org/drawingml/2006/main" flipV="0">
+              <a:off x="7143750" y="6696075"/>
+              <a:ext cx="190500" cy="23813"/>
+            </a:xfrm>
+            <a:prstGeom xmlns:a="http://schemas.openxmlformats.org/drawingml/2006/main" prst="line">
+              <a:avLst/>
+            </a:prstGeom>
+            <a:noFill xmlns:a="http://schemas.openxmlformats.org/drawingml/2006/main"/>
+            <a:ln xmlns:a="http://schemas.openxmlformats.org/drawingml/2006/main" w="24765">
+              <a:solidFill>
+                <a:srgbClr val="3D896D"/>
+              </a:solidFill>
+            </a:ln>
+          </p:spPr>
+        </p:sp>
+        <p:sp>
+          <p:nvSpPr>
+            <p:cNvPr id="140" name="anomaly-output">
+              <a:extLst xmlns:a="http://schemas.openxmlformats.org/drawingml/2006/main">
+                <a:ext uri="{FF2B5EF4-FFF2-40B4-BE49-F238E27FC236}">
+                  <a16:creationId xmlns:a16="http://schemas.microsoft.com/office/drawing/2014/main" id="{54BE89CA-CE69-40B4-9553-D2CD63FC2C9D}"/>
+                </a:ext>
+              </a:extLst>
+            </p:cNvPr>
+            <p:cNvSpPr>
+              <a:spLocks xmlns:a="http://schemas.openxmlformats.org/drawingml/2006/main" noGrp="1"/>
+            </p:cNvSpPr>
+            <p:nvPr/>
+          </p:nvSpPr>
+          <p:spPr>
+            <a:xfrm xmlns:a="http://schemas.openxmlformats.org/drawingml/2006/main">
+              <a:off x="9658350" y="6238875"/>
+              <a:ext cx="342900" cy="619125"/>
+            </a:xfrm>
+            <a:prstGeom xmlns:a="http://schemas.openxmlformats.org/drawingml/2006/main" prst="rect">
+              <a:avLst/>
+            </a:prstGeom>
+            <a:solidFill xmlns:a="http://schemas.openxmlformats.org/drawingml/2006/main">
+              <a:srgbClr val="EFBFBD"/>
+            </a:solidFill>
+            <a:ln xmlns:a="http://schemas.openxmlformats.org/drawingml/2006/main" w="19050">
+              <a:noFill/>
+            </a:ln>
+          </p:spPr>
+        </p:sp>
+        <p:sp>
+          <p:nvSpPr>
+            <p:cNvPr id="141" name="anomaly-output">
+              <a:extLst xmlns:a="http://schemas.openxmlformats.org/drawingml/2006/main">
+                <a:ext uri="{FF2B5EF4-FFF2-40B4-BE49-F238E27FC236}">
+                  <a16:creationId xmlns:a16="http://schemas.microsoft.com/office/drawing/2014/main" id="{C6F85EC7-85C2-4DB9-ABEE-ECB249661B19}"/>
+                </a:ext>
+              </a:extLst>
+            </p:cNvPr>
+            <p:cNvSpPr>
+              <a:spLocks xmlns:a="http://schemas.openxmlformats.org/drawingml/2006/main" noGrp="1"/>
+            </p:cNvSpPr>
+            <p:nvPr/>
+          </p:nvSpPr>
+          <p:spPr>
+            <a:xfrm xmlns:a="http://schemas.openxmlformats.org/drawingml/2006/main" flipV="0">
+              <a:off x="9172575" y="6238875"/>
+              <a:ext cx="95" cy="619125"/>
+            </a:xfrm>
+            <a:prstGeom xmlns:a="http://schemas.openxmlformats.org/drawingml/2006/main" prst="line">
+              <a:avLst/>
+            </a:prstGeom>
+            <a:noFill xmlns:a="http://schemas.openxmlformats.org/drawingml/2006/main"/>
+            <a:ln xmlns:a="http://schemas.openxmlformats.org/drawingml/2006/main" w="9525">
+              <a:solidFill>
+                <a:srgbClr val="747B80"/>
+              </a:solidFill>
+            </a:ln>
+          </p:spPr>
+        </p:sp>
+        <p:sp>
+          <p:nvSpPr>
+            <p:cNvPr id="142" name="anomaly-output">
+              <a:extLst xmlns:a="http://schemas.openxmlformats.org/drawingml/2006/main">
+                <a:ext uri="{FF2B5EF4-FFF2-40B4-BE49-F238E27FC236}">
+                  <a16:creationId xmlns:a16="http://schemas.microsoft.com/office/drawing/2014/main" id="{F0090B22-05BD-432D-A857-0B2C171B9169}"/>
+                </a:ext>
+              </a:extLst>
+            </p:cNvPr>
+            <p:cNvSpPr>
+              <a:spLocks xmlns:a="http://schemas.openxmlformats.org/drawingml/2006/main" noGrp="1"/>
+            </p:cNvSpPr>
+            <p:nvPr/>
+          </p:nvSpPr>
+          <p:spPr>
+            <a:xfrm xmlns:a="http://schemas.openxmlformats.org/drawingml/2006/main" flipV="0">
+              <a:off x="9172575" y="6858000"/>
+              <a:ext cx="1476375" cy="95"/>
+            </a:xfrm>
+            <a:prstGeom xmlns:a="http://schemas.openxmlformats.org/drawingml/2006/main" prst="line">
+              <a:avLst/>
+            </a:prstGeom>
+            <a:noFill xmlns:a="http://schemas.openxmlformats.org/drawingml/2006/main"/>
+            <a:ln xmlns:a="http://schemas.openxmlformats.org/drawingml/2006/main" w="9525">
+              <a:solidFill>
+                <a:srgbClr val="747B80"/>
+              </a:solidFill>
+            </a:ln>
+          </p:spPr>
+        </p:sp>
+        <p:sp>
+          <p:nvSpPr>
+            <p:cNvPr id="143" name="anomaly-output">
+              <a:extLst xmlns:a="http://schemas.openxmlformats.org/drawingml/2006/main">
+                <a:ext uri="{FF2B5EF4-FFF2-40B4-BE49-F238E27FC236}">
+                  <a16:creationId xmlns:a16="http://schemas.microsoft.com/office/drawing/2014/main" id="{D8EFBBD2-C108-495D-B7BA-4E9A9D19D138}"/>
+                </a:ext>
+              </a:extLst>
+            </p:cNvPr>
+            <p:cNvSpPr>
+              <a:spLocks xmlns:a="http://schemas.openxmlformats.org/drawingml/2006/main" noGrp="1"/>
+            </p:cNvSpPr>
+            <p:nvPr/>
+          </p:nvSpPr>
+          <p:spPr>
+            <a:xfrm xmlns:a="http://schemas.openxmlformats.org/drawingml/2006/main" flipV="1">
+              <a:off x="9172575" y="6659880"/>
+              <a:ext cx="246063" cy="12382"/>
+            </a:xfrm>
+            <a:prstGeom xmlns:a="http://schemas.openxmlformats.org/drawingml/2006/main" prst="line">
+              <a:avLst/>
+            </a:prstGeom>
+            <a:noFill xmlns:a="http://schemas.openxmlformats.org/drawingml/2006/main"/>
+            <a:ln xmlns:a="http://schemas.openxmlformats.org/drawingml/2006/main" w="24765">
+              <a:solidFill>
+                <a:srgbClr val="356F84"/>
+              </a:solidFill>
+            </a:ln>
+          </p:spPr>
+        </p:sp>
+        <p:sp>
+          <p:nvSpPr>
+            <p:cNvPr id="144" name="anomaly-output">
+              <a:extLst xmlns:a="http://schemas.openxmlformats.org/drawingml/2006/main">
+                <a:ext uri="{FF2B5EF4-FFF2-40B4-BE49-F238E27FC236}">
+                  <a16:creationId xmlns:a16="http://schemas.microsoft.com/office/drawing/2014/main" id="{56BBE4D2-5BF8-4043-9808-9A72A5EF2FC3}"/>
+                </a:ext>
+              </a:extLst>
+            </p:cNvPr>
+            <p:cNvSpPr>
+              <a:spLocks xmlns:a="http://schemas.openxmlformats.org/drawingml/2006/main" noGrp="1"/>
+            </p:cNvSpPr>
+            <p:nvPr/>
+          </p:nvSpPr>
+          <p:spPr>
+            <a:xfrm xmlns:a="http://schemas.openxmlformats.org/drawingml/2006/main" flipV="0">
+              <a:off x="9418638" y="6659880"/>
+              <a:ext cx="246062" cy="24765"/>
+            </a:xfrm>
+            <a:prstGeom xmlns:a="http://schemas.openxmlformats.org/drawingml/2006/main" prst="line">
+              <a:avLst/>
+            </a:prstGeom>
+            <a:noFill xmlns:a="http://schemas.openxmlformats.org/drawingml/2006/main"/>
+            <a:ln xmlns:a="http://schemas.openxmlformats.org/drawingml/2006/main" w="24765">
+              <a:solidFill>
+                <a:srgbClr val="356F84"/>
+              </a:solidFill>
+            </a:ln>
+          </p:spPr>
+        </p:sp>
+        <p:sp>
+          <p:nvSpPr>
+            <p:cNvPr id="145" name="anomaly-output">
+              <a:extLst xmlns:a="http://schemas.openxmlformats.org/drawingml/2006/main">
+                <a:ext uri="{FF2B5EF4-FFF2-40B4-BE49-F238E27FC236}">
+                  <a16:creationId xmlns:a16="http://schemas.microsoft.com/office/drawing/2014/main" id="{2355E832-E103-4142-871E-DC59A6919529}"/>
+                </a:ext>
+              </a:extLst>
+            </p:cNvPr>
+            <p:cNvSpPr>
+              <a:spLocks xmlns:a="http://schemas.openxmlformats.org/drawingml/2006/main" noGrp="1"/>
+            </p:cNvSpPr>
+            <p:nvPr/>
+          </p:nvSpPr>
+          <p:spPr>
+            <a:xfrm xmlns:a="http://schemas.openxmlformats.org/drawingml/2006/main" flipV="1">
+              <a:off x="9664700" y="6300788"/>
+              <a:ext cx="246063" cy="383857"/>
+            </a:xfrm>
+            <a:prstGeom xmlns:a="http://schemas.openxmlformats.org/drawingml/2006/main" prst="line">
+              <a:avLst/>
+            </a:prstGeom>
+            <a:noFill xmlns:a="http://schemas.openxmlformats.org/drawingml/2006/main"/>
+            <a:ln xmlns:a="http://schemas.openxmlformats.org/drawingml/2006/main" w="24765">
+              <a:solidFill>
+                <a:srgbClr val="356F84"/>
+              </a:solidFill>
+            </a:ln>
+          </p:spPr>
+        </p:sp>
+        <p:sp>
+          <p:nvSpPr>
+            <p:cNvPr id="146" name="anomaly-output">
+              <a:extLst xmlns:a="http://schemas.openxmlformats.org/drawingml/2006/main">
+                <a:ext uri="{FF2B5EF4-FFF2-40B4-BE49-F238E27FC236}">
+                  <a16:creationId xmlns:a16="http://schemas.microsoft.com/office/drawing/2014/main" id="{6D56C7A7-3D95-499D-825B-AA1890D7073C}"/>
+                </a:ext>
+              </a:extLst>
+            </p:cNvPr>
+            <p:cNvSpPr>
+              <a:spLocks xmlns:a="http://schemas.openxmlformats.org/drawingml/2006/main" noGrp="1"/>
+            </p:cNvSpPr>
+            <p:nvPr/>
+          </p:nvSpPr>
+          <p:spPr>
+            <a:xfrm xmlns:a="http://schemas.openxmlformats.org/drawingml/2006/main" flipV="0">
+              <a:off x="9910763" y="6300788"/>
+              <a:ext cx="246062" cy="371475"/>
+            </a:xfrm>
+            <a:prstGeom xmlns:a="http://schemas.openxmlformats.org/drawingml/2006/main" prst="line">
+              <a:avLst/>
+            </a:prstGeom>
+            <a:noFill xmlns:a="http://schemas.openxmlformats.org/drawingml/2006/main"/>
+            <a:ln xmlns:a="http://schemas.openxmlformats.org/drawingml/2006/main" w="24765">
+              <a:solidFill>
+                <a:srgbClr val="356F84"/>
+              </a:solidFill>
+            </a:ln>
+          </p:spPr>
+        </p:sp>
+        <p:sp>
+          <p:nvSpPr>
+            <p:cNvPr id="147" name="anomaly-output">
+              <a:extLst xmlns:a="http://schemas.openxmlformats.org/drawingml/2006/main">
+                <a:ext uri="{FF2B5EF4-FFF2-40B4-BE49-F238E27FC236}">
+                  <a16:creationId xmlns:a16="http://schemas.microsoft.com/office/drawing/2014/main" id="{5E2D6D17-3C03-4773-A197-C75A642D70A8}"/>
+                </a:ext>
+              </a:extLst>
+            </p:cNvPr>
+            <p:cNvSpPr>
+              <a:spLocks xmlns:a="http://schemas.openxmlformats.org/drawingml/2006/main" noGrp="1"/>
+            </p:cNvSpPr>
+            <p:nvPr/>
+          </p:nvSpPr>
+          <p:spPr>
+            <a:xfrm xmlns:a="http://schemas.openxmlformats.org/drawingml/2006/main" flipV="1">
+              <a:off x="10156825" y="6641306"/>
+              <a:ext cx="246063" cy="30956"/>
+            </a:xfrm>
+            <a:prstGeom xmlns:a="http://schemas.openxmlformats.org/drawingml/2006/main" prst="line">
+              <a:avLst/>
+            </a:prstGeom>
+            <a:noFill xmlns:a="http://schemas.openxmlformats.org/drawingml/2006/main"/>
+            <a:ln xmlns:a="http://schemas.openxmlformats.org/drawingml/2006/main" w="24765">
+              <a:solidFill>
+                <a:srgbClr val="356F84"/>
+              </a:solidFill>
+            </a:ln>
+          </p:spPr>
+        </p:sp>
+        <p:sp>
+          <p:nvSpPr>
+            <p:cNvPr id="148" name="anomaly-output">
+              <a:extLst xmlns:a="http://schemas.openxmlformats.org/drawingml/2006/main">
+                <a:ext uri="{FF2B5EF4-FFF2-40B4-BE49-F238E27FC236}">
+                  <a16:creationId xmlns:a16="http://schemas.microsoft.com/office/drawing/2014/main" id="{4838E51B-B00B-4AF6-BFBA-B86BB1E85BDC}"/>
+                </a:ext>
+              </a:extLst>
+            </p:cNvPr>
+            <p:cNvSpPr>
+              <a:spLocks xmlns:a="http://schemas.openxmlformats.org/drawingml/2006/main" noGrp="1"/>
+            </p:cNvSpPr>
+            <p:nvPr/>
+          </p:nvSpPr>
+          <p:spPr>
+            <a:xfrm xmlns:a="http://schemas.openxmlformats.org/drawingml/2006/main" flipV="0">
+              <a:off x="10402888" y="6641306"/>
+              <a:ext cx="246062" cy="24765"/>
+            </a:xfrm>
+            <a:prstGeom xmlns:a="http://schemas.openxmlformats.org/drawingml/2006/main" prst="line">
+              <a:avLst/>
+            </a:prstGeom>
+            <a:noFill xmlns:a="http://schemas.openxmlformats.org/drawingml/2006/main"/>
+            <a:ln xmlns:a="http://schemas.openxmlformats.org/drawingml/2006/main" w="24765">
+              <a:solidFill>
+                <a:srgbClr val="356F84"/>
+              </a:solidFill>
+            </a:ln>
+          </p:spPr>
+        </p:sp>
+        <p:sp>
+          <p:nvSpPr>
+            <p:cNvPr id="149" name="decision-output">
+              <a:extLst xmlns:a="http://schemas.openxmlformats.org/drawingml/2006/main">
+                <a:ext uri="{FF2B5EF4-FFF2-40B4-BE49-F238E27FC236}">
+                  <a16:creationId xmlns:a16="http://schemas.microsoft.com/office/drawing/2014/main" id="{AF0C6682-AAED-43E8-B475-1B1D0DD76DD4}"/>
+                </a:ext>
+              </a:extLst>
+            </p:cNvPr>
+            <p:cNvSpPr>
+              <a:spLocks xmlns:a="http://schemas.openxmlformats.org/drawingml/2006/main" noGrp="1"/>
+            </p:cNvSpPr>
+            <p:nvPr/>
+          </p:nvSpPr>
+          <p:spPr>
+            <a:xfrm xmlns:a="http://schemas.openxmlformats.org/drawingml/2006/main">
+              <a:off x="12353925" y="6524625"/>
+              <a:ext cx="238125" cy="238125"/>
+            </a:xfrm>
+            <a:prstGeom xmlns:a="http://schemas.openxmlformats.org/drawingml/2006/main" prst="rect">
+              <a:avLst/>
+            </a:prstGeom>
+            <a:solidFill xmlns:a="http://schemas.openxmlformats.org/drawingml/2006/main">
+              <a:srgbClr val="C9C1DE"/>
+            </a:solidFill>
+            <a:ln xmlns:a="http://schemas.openxmlformats.org/drawingml/2006/main" w="19050">
+              <a:solidFill>
+                <a:srgbClr val="6E65A0"/>
+              </a:solidFill>
+            </a:ln>
+          </p:spPr>
+        </p:sp>
+        <p:sp>
+          <p:nvSpPr>
+            <p:cNvPr id="150" name="decision-output">
+              <a:extLst xmlns:a="http://schemas.openxmlformats.org/drawingml/2006/main">
+                <a:ext uri="{FF2B5EF4-FFF2-40B4-BE49-F238E27FC236}">
+                  <a16:creationId xmlns:a16="http://schemas.microsoft.com/office/drawing/2014/main" id="{79128A21-4B44-4858-91A6-70C5F855D305}"/>
+                </a:ext>
+              </a:extLst>
+            </p:cNvPr>
+            <p:cNvSpPr>
+              <a:spLocks xmlns:a="http://schemas.openxmlformats.org/drawingml/2006/main" noGrp="1"/>
+            </p:cNvSpPr>
+            <p:nvPr/>
+          </p:nvSpPr>
+          <p:spPr>
+            <a:xfrm xmlns:a="http://schemas.openxmlformats.org/drawingml/2006/main">
+              <a:off x="12830175" y="6229350"/>
+              <a:ext cx="238125" cy="533400"/>
+            </a:xfrm>
+            <a:prstGeom xmlns:a="http://schemas.openxmlformats.org/drawingml/2006/main" prst="rect">
+              <a:avLst/>
+            </a:prstGeom>
+            <a:solidFill xmlns:a="http://schemas.openxmlformats.org/drawingml/2006/main">
+              <a:srgbClr val="6E65A0"/>
+            </a:solidFill>
+            <a:ln xmlns:a="http://schemas.openxmlformats.org/drawingml/2006/main" w="19050">
+              <a:solidFill>
+                <a:srgbClr val="6E65A0"/>
+              </a:solidFill>
+            </a:ln>
+          </p:spPr>
+        </p:sp>
+        <p:sp>
+          <p:nvSpPr>
+            <p:cNvPr id="151" name="decision-output">
+              <a:extLst xmlns:a="http://schemas.openxmlformats.org/drawingml/2006/main">
+                <a:ext uri="{FF2B5EF4-FFF2-40B4-BE49-F238E27FC236}">
+                  <a16:creationId xmlns:a16="http://schemas.microsoft.com/office/drawing/2014/main" id="{FCA28951-5D2D-4C6D-91F6-38E2CBC14062}"/>
+                </a:ext>
+              </a:extLst>
+            </p:cNvPr>
+            <p:cNvSpPr>
+              <a:spLocks xmlns:a="http://schemas.openxmlformats.org/drawingml/2006/main" noGrp="1"/>
+            </p:cNvSpPr>
+            <p:nvPr/>
+          </p:nvSpPr>
+          <p:spPr>
+            <a:xfrm xmlns:a="http://schemas.openxmlformats.org/drawingml/2006/main">
+              <a:off x="13306425" y="6381750"/>
+              <a:ext cx="238125" cy="381000"/>
+            </a:xfrm>
+            <a:prstGeom xmlns:a="http://schemas.openxmlformats.org/drawingml/2006/main" prst="rect">
+              <a:avLst/>
+            </a:prstGeom>
+            <a:solidFill xmlns:a="http://schemas.openxmlformats.org/drawingml/2006/main">
+              <a:srgbClr val="C9C1DE"/>
+            </a:solidFill>
+            <a:ln xmlns:a="http://schemas.openxmlformats.org/drawingml/2006/main" w="19050">
+              <a:solidFill>
+                <a:srgbClr val="6E65A0"/>
+              </a:solidFill>
+            </a:ln>
+          </p:spPr>
+        </p:sp>
+        <p:sp>
+          <p:nvSpPr>
+            <p:cNvPr id="152" name="decision-output">
+              <a:extLst xmlns:a="http://schemas.openxmlformats.org/drawingml/2006/main">
+                <a:ext uri="{FF2B5EF4-FFF2-40B4-BE49-F238E27FC236}">
+                  <a16:creationId xmlns:a16="http://schemas.microsoft.com/office/drawing/2014/main" id="{DD86A683-7269-444C-BA13-265AC72E3D1C}"/>
+                </a:ext>
+              </a:extLst>
+            </p:cNvPr>
+            <p:cNvSpPr>
+              <a:spLocks xmlns:a="http://schemas.openxmlformats.org/drawingml/2006/main" noGrp="1"/>
+            </p:cNvSpPr>
+            <p:nvPr/>
+          </p:nvSpPr>
+          <p:spPr>
+            <a:xfrm xmlns:a="http://schemas.openxmlformats.org/drawingml/2006/main" flipV="0">
+              <a:off x="12268200" y="6781800"/>
+              <a:ext cx="1485900" cy="95"/>
+            </a:xfrm>
+            <a:prstGeom xmlns:a="http://schemas.openxmlformats.org/drawingml/2006/main" prst="line">
+              <a:avLst/>
+            </a:prstGeom>
+            <a:noFill xmlns:a="http://schemas.openxmlformats.org/drawingml/2006/main"/>
+            <a:ln xmlns:a="http://schemas.openxmlformats.org/drawingml/2006/main" w="14288">
+              <a:solidFill>
+                <a:srgbClr val="6E65A0"/>
+              </a:solidFill>
+            </a:ln>
+          </p:spPr>
         </p:sp>
       </p:grpSp>
     </p:spTree>
